--- a/docs/presentation.pptx
+++ b/docs/presentation.pptx
@@ -11663,7 +11663,7 @@
                 </a:solidFill>
                 <a:latin typeface="Calibri"/>
               </a:rPr>
-              <a:t>→ vuoti funzionali: "manca un capospalla", "troppe t-shirt"</a:t>
+              <a:t>→ vuoti funzionali: "manca una giacca", "troppe t-shirt"</a:t>
             </a:r>
           </a:p>
         </p:txBody>

--- a/docs/presentation.pptx
+++ b/docs/presentation.pptx
@@ -11105,7 +11105,7 @@
                 </a:solidFill>
                 <a:latin typeface="Calibri"/>
               </a:rPr>
-              <a:t>Blu = pre-addestrato · Verde = rete addestrata da noi. Due livelli collegati dai dati.</a:t>
+              <a:t>Blu = pre-addestrato · Verde = addestrato da noi · Giallo = regole. Tre livelli collegati dai dati.</a:t>
             </a:r>
           </a:p>
         </p:txBody>
@@ -11161,8 +11161,8 @@
         </p:nvSpPr>
         <p:spPr>
           <a:xfrm>
-            <a:off x="548640" y="1783080"/>
-            <a:ext cx="10972800" cy="320040"/>
+            <a:off x="548640" y="1645920"/>
+            <a:ext cx="10972800" cy="274320"/>
           </a:xfrm>
           <a:prstGeom prst="rect">
             <a:avLst/>
@@ -11177,7 +11177,7 @@
           <a:p>
             <a:pPr algn="l"/>
             <a:r>
-              <a:rPr sz="1200" b="1" i="0">
+              <a:rPr sz="1100" b="1" i="0">
                 <a:solidFill>
                   <a:srgbClr val="1A1D27"/>
                 </a:solidFill>
@@ -11196,8 +11196,8 @@
         </p:nvSpPr>
         <p:spPr>
           <a:xfrm>
-            <a:off x="548640" y="2148840"/>
-            <a:ext cx="3657600" cy="1737360"/>
+            <a:off x="548640" y="1920240"/>
+            <a:ext cx="3657600" cy="1143000"/>
           </a:xfrm>
           <a:prstGeom prst="roundRect">
             <a:avLst/>
@@ -11232,11 +11232,11 @@
           <a:p>
             <a:pPr algn="l">
               <a:spcAft>
-                <a:spcPts val="200"/>
-              </a:spcAft>
-            </a:pPr>
-            <a:r>
-              <a:rPr sz="1500" b="1" i="0">
+                <a:spcPts val="100"/>
+              </a:spcAft>
+            </a:pPr>
+            <a:r>
+              <a:rPr sz="1300" b="1" i="0">
                 <a:solidFill>
                   <a:srgbClr val="1A1D27"/>
                 </a:solidFill>
@@ -11248,11 +11248,11 @@
           <a:p>
             <a:pPr algn="l">
               <a:spcAft>
-                <a:spcPts val="800"/>
-              </a:spcAft>
-            </a:pPr>
-            <a:r>
-              <a:rPr sz="1000" b="0" i="1">
+                <a:spcPts val="400"/>
+              </a:spcAft>
+            </a:pPr>
+            <a:r>
+              <a:rPr sz="900" b="0" i="1">
                 <a:solidFill>
                   <a:srgbClr val="4A6DDC"/>
                 </a:solidFill>
@@ -11268,13 +11268,13 @@
               </a:spcAft>
             </a:pPr>
             <a:r>
-              <a:rPr sz="1200" b="0" i="0">
+              <a:rPr sz="1050" b="0" i="0">
                 <a:solidFill>
                   <a:srgbClr val="6B7182"/>
                 </a:solidFill>
                 <a:latin typeface="Calibri"/>
               </a:rPr>
-              <a:t>→ categoria + colore</a:t>
+              <a:t>→ categoria + colore (+ embedding)</a:t>
             </a:r>
           </a:p>
         </p:txBody>
@@ -11287,8 +11287,8 @@
         </p:nvSpPr>
         <p:spPr>
           <a:xfrm>
-            <a:off x="4361688" y="2148840"/>
-            <a:ext cx="3657600" cy="1737360"/>
+            <a:off x="4361688" y="1920240"/>
+            <a:ext cx="3657600" cy="1143000"/>
           </a:xfrm>
           <a:prstGeom prst="roundRect">
             <a:avLst/>
@@ -11323,11 +11323,11 @@
           <a:p>
             <a:pPr algn="l">
               <a:spcAft>
-                <a:spcPts val="200"/>
-              </a:spcAft>
-            </a:pPr>
-            <a:r>
-              <a:rPr sz="1500" b="1" i="0">
+                <a:spcPts val="100"/>
+              </a:spcAft>
+            </a:pPr>
+            <a:r>
+              <a:rPr sz="1300" b="1" i="0">
                 <a:solidFill>
                   <a:srgbClr val="1A1D27"/>
                 </a:solidFill>
@@ -11339,11 +11339,11 @@
           <a:p>
             <a:pPr algn="l">
               <a:spcAft>
-                <a:spcPts val="800"/>
-              </a:spcAft>
-            </a:pPr>
-            <a:r>
-              <a:rPr sz="1000" b="0" i="1">
+                <a:spcPts val="400"/>
+              </a:spcAft>
+            </a:pPr>
+            <a:r>
+              <a:rPr sz="900" b="0" i="1">
                 <a:solidFill>
                   <a:srgbClr val="2F8F6E"/>
                 </a:solidFill>
@@ -11359,14 +11359,13 @@
               </a:spcAft>
             </a:pPr>
             <a:r>
-              <a:rPr sz="1200" b="0" i="0">
+              <a:rPr sz="1050" b="0" i="0">
                 <a:solidFill>
                   <a:srgbClr val="6B7182"/>
                 </a:solidFill>
                 <a:latin typeface="Calibri"/>
               </a:rPr>
-              <a:t>→ nuovo / usurato /
-danneggiato
+              <a:t>→ nuovo/usurato/danneggiato
 → tutorial di recupero</a:t>
             </a:r>
           </a:p>
@@ -11380,8 +11379,8 @@
         </p:nvSpPr>
         <p:spPr>
           <a:xfrm>
-            <a:off x="8174736" y="2148840"/>
-            <a:ext cx="3657600" cy="1737360"/>
+            <a:off x="8174736" y="1920240"/>
+            <a:ext cx="3657600" cy="1143000"/>
           </a:xfrm>
           <a:prstGeom prst="roundRect">
             <a:avLst/>
@@ -11416,11 +11415,11 @@
           <a:p>
             <a:pPr algn="l">
               <a:spcAft>
-                <a:spcPts val="200"/>
-              </a:spcAft>
-            </a:pPr>
-            <a:r>
-              <a:rPr sz="1500" b="1" i="0">
+                <a:spcPts val="100"/>
+              </a:spcAft>
+            </a:pPr>
+            <a:r>
+              <a:rPr sz="1300" b="1" i="0">
                 <a:solidFill>
                   <a:srgbClr val="1A1D27"/>
                 </a:solidFill>
@@ -11432,11 +11431,11 @@
           <a:p>
             <a:pPr algn="l">
               <a:spcAft>
-                <a:spcPts val="800"/>
-              </a:spcAft>
-            </a:pPr>
-            <a:r>
-              <a:rPr sz="1000" b="0" i="1">
+                <a:spcPts val="400"/>
+              </a:spcAft>
+            </a:pPr>
+            <a:r>
+              <a:rPr sz="900" b="0" i="1">
                 <a:solidFill>
                   <a:srgbClr val="C88B2E"/>
                 </a:solidFill>
@@ -11452,38 +11451,75 @@
               </a:spcAft>
             </a:pPr>
             <a:r>
-              <a:rPr sz="1200" b="0" i="0">
+              <a:rPr sz="1050" b="0" i="0">
                 <a:solidFill>
                   <a:srgbClr val="6B7182"/>
                 </a:solidFill>
                 <a:latin typeface="Calibri"/>
               </a:rPr>
-              <a:t>→ impatto energetico
-del singolo capo</a:t>
-            </a:r>
-          </a:p>
-        </p:txBody>
-      </p:sp>
-      <p:sp>
-        <p:nvSpPr>
-          <p:cNvPr id="10" name="Down Arrow 9"/>
+              <a:t>→ impatto di produzione</a:t>
+            </a:r>
+          </a:p>
+        </p:txBody>
+      </p:sp>
+      <p:sp>
+        <p:nvSpPr>
+          <p:cNvPr id="10" name="TextBox 9"/>
+          <p:cNvSpPr txBox="1"/>
+          <p:nvPr/>
+        </p:nvSpPr>
+        <p:spPr>
+          <a:xfrm>
+            <a:off x="548640" y="3200400"/>
+            <a:ext cx="10972800" cy="274320"/>
+          </a:xfrm>
+          <a:prstGeom prst="rect">
+            <a:avLst/>
+          </a:prstGeom>
+          <a:noFill/>
+        </p:spPr>
+        <p:txBody>
+          <a:bodyPr wrap="square" lIns="0" rIns="0" tIns="0" bIns="0">
+            <a:spAutoFit/>
+          </a:bodyPr>
+          <a:lstStyle/>
+          <a:p>
+            <a:pPr algn="l"/>
+            <a:r>
+              <a:rPr sz="1100" b="1" i="0">
+                <a:solidFill>
+                  <a:srgbClr val="1A1D27"/>
+                </a:solidFill>
+                <a:latin typeface="Calibri"/>
+              </a:rPr>
+              <a:t>✓  USO NEL TEMPO · un tap 'indossato oggi'</a:t>
+            </a:r>
+          </a:p>
+        </p:txBody>
+      </p:sp>
+      <p:sp>
+        <p:nvSpPr>
+          <p:cNvPr id="11" name="Rounded Rectangle 10"/>
           <p:cNvSpPr/>
           <p:nvPr/>
         </p:nvSpPr>
         <p:spPr>
           <a:xfrm>
-            <a:off x="5760720" y="3977639"/>
-            <a:ext cx="640080" cy="411480"/>
-          </a:xfrm>
-          <a:prstGeom prst="downArrow">
+            <a:off x="548640" y="3474720"/>
+            <a:ext cx="3657600" cy="1143000"/>
+          </a:xfrm>
+          <a:prstGeom prst="roundRect">
             <a:avLst/>
           </a:prstGeom>
           <a:solidFill>
-            <a:srgbClr val="1A1D27"/>
+            <a:srgbClr val="E0E8FA"/>
           </a:solidFill>
-          <a:ln>
-            <a:noFill/>
+          <a:ln w="9525">
+            <a:solidFill>
+              <a:srgbClr val="4A6DDC"/>
+            </a:solidFill>
           </a:ln>
+          <a:effectLst/>
         </p:spPr>
         <p:style>
           <a:lnRef idx="1">
@@ -11500,23 +11536,250 @@
           </a:fontRef>
         </p:style>
         <p:txBody>
-          <a:bodyPr rtlCol="0" anchor="ctr"/>
-          <a:lstStyle/>
-          <a:p>
-            <a:pPr algn="ctr"/>
-          </a:p>
-        </p:txBody>
-      </p:sp>
-      <p:sp>
-        <p:nvSpPr>
-          <p:cNvPr id="11" name="TextBox 10"/>
+          <a:bodyPr rtlCol="0" anchor="ctr" lIns="164592" rIns="164592" tIns="109728" bIns="109728" wrap="square"/>
+          <a:lstStyle/>
+          <a:p>
+            <a:pPr algn="l">
+              <a:spcAft>
+                <a:spcPts val="100"/>
+              </a:spcAft>
+            </a:pPr>
+            <a:r>
+              <a:rPr sz="1300" b="1" i="0">
+                <a:solidFill>
+                  <a:srgbClr val="1A1D27"/>
+                </a:solidFill>
+                <a:latin typeface="Calibri"/>
+              </a:rPr>
+              <a:t>Wear log</a:t>
+            </a:r>
+          </a:p>
+          <a:p>
+            <a:pPr algn="l">
+              <a:spcAft>
+                <a:spcPts val="400"/>
+              </a:spcAft>
+            </a:pPr>
+            <a:r>
+              <a:rPr sz="900" b="0" i="1">
+                <a:solidFill>
+                  <a:srgbClr val="4A6DDC"/>
+                </a:solidFill>
+                <a:latin typeface="Calibri"/>
+              </a:rPr>
+              <a:t>conteggio utilizzi</a:t>
+            </a:r>
+          </a:p>
+          <a:p>
+            <a:pPr algn="l">
+              <a:spcAft>
+                <a:spcPts val="400"/>
+              </a:spcAft>
+            </a:pPr>
+            <a:r>
+              <a:rPr sz="1050" b="0" i="0">
+                <a:solidFill>
+                  <a:srgbClr val="6B7182"/>
+                </a:solidFill>
+                <a:latin typeface="Calibri"/>
+              </a:rPr>
+              <a:t>→ quante volte l'hai indossato</a:t>
+            </a:r>
+          </a:p>
+        </p:txBody>
+      </p:sp>
+      <p:sp>
+        <p:nvSpPr>
+          <p:cNvPr id="12" name="Rounded Rectangle 11"/>
+          <p:cNvSpPr/>
+          <p:nvPr/>
+        </p:nvSpPr>
+        <p:spPr>
+          <a:xfrm>
+            <a:off x="4361688" y="3474720"/>
+            <a:ext cx="3657600" cy="1143000"/>
+          </a:xfrm>
+          <a:prstGeom prst="roundRect">
+            <a:avLst/>
+          </a:prstGeom>
+          <a:solidFill>
+            <a:srgbClr val="FFFFFF"/>
+          </a:solidFill>
+          <a:ln w="9525">
+            <a:solidFill>
+              <a:srgbClr val="C88B2E"/>
+            </a:solidFill>
+          </a:ln>
+          <a:effectLst/>
+        </p:spPr>
+        <p:style>
+          <a:lnRef idx="1">
+            <a:schemeClr val="accent1"/>
+          </a:lnRef>
+          <a:fillRef idx="3">
+            <a:schemeClr val="accent1"/>
+          </a:fillRef>
+          <a:effectRef idx="2">
+            <a:schemeClr val="accent1"/>
+          </a:effectRef>
+          <a:fontRef idx="minor">
+            <a:schemeClr val="lt1"/>
+          </a:fontRef>
+        </p:style>
+        <p:txBody>
+          <a:bodyPr rtlCol="0" anchor="ctr" lIns="164592" rIns="164592" tIns="109728" bIns="109728" wrap="square"/>
+          <a:lstStyle/>
+          <a:p>
+            <a:pPr algn="l">
+              <a:spcAft>
+                <a:spcPts val="100"/>
+              </a:spcAft>
+            </a:pPr>
+            <a:r>
+              <a:rPr sz="1300" b="1" i="0">
+                <a:solidFill>
+                  <a:srgbClr val="1A1D27"/>
+                </a:solidFill>
+                <a:latin typeface="Calibri"/>
+              </a:rPr>
+              <a:t>Cost-per-wear</a:t>
+            </a:r>
+          </a:p>
+          <a:p>
+            <a:pPr algn="l">
+              <a:spcAft>
+                <a:spcPts val="400"/>
+              </a:spcAft>
+            </a:pPr>
+            <a:r>
+              <a:rPr sz="900" b="0" i="1">
+                <a:solidFill>
+                  <a:srgbClr val="C88B2E"/>
+                </a:solidFill>
+                <a:latin typeface="Calibri"/>
+              </a:rPr>
+              <a:t>calcolo</a:t>
+            </a:r>
+          </a:p>
+          <a:p>
+            <a:pPr algn="l">
+              <a:spcAft>
+                <a:spcPts val="400"/>
+              </a:spcAft>
+            </a:pPr>
+            <a:r>
+              <a:rPr sz="1050" b="0" i="0">
+                <a:solidFill>
+                  <a:srgbClr val="6B7182"/>
+                </a:solidFill>
+                <a:latin typeface="Calibri"/>
+              </a:rPr>
+              <a:t>→ prezzo ÷ n. utilizzi</a:t>
+            </a:r>
+          </a:p>
+        </p:txBody>
+      </p:sp>
+      <p:sp>
+        <p:nvSpPr>
+          <p:cNvPr id="13" name="Rounded Rectangle 12"/>
+          <p:cNvSpPr/>
+          <p:nvPr/>
+        </p:nvSpPr>
+        <p:spPr>
+          <a:xfrm>
+            <a:off x="8174736" y="3474720"/>
+            <a:ext cx="3657600" cy="1143000"/>
+          </a:xfrm>
+          <a:prstGeom prst="roundRect">
+            <a:avLst/>
+          </a:prstGeom>
+          <a:solidFill>
+            <a:srgbClr val="FFFFFF"/>
+          </a:solidFill>
+          <a:ln w="9525">
+            <a:solidFill>
+              <a:srgbClr val="C88B2E"/>
+            </a:solidFill>
+          </a:ln>
+          <a:effectLst/>
+        </p:spPr>
+        <p:style>
+          <a:lnRef idx="1">
+            <a:schemeClr val="accent1"/>
+          </a:lnRef>
+          <a:fillRef idx="3">
+            <a:schemeClr val="accent1"/>
+          </a:fillRef>
+          <a:effectRef idx="2">
+            <a:schemeClr val="accent1"/>
+          </a:effectRef>
+          <a:fontRef idx="minor">
+            <a:schemeClr val="lt1"/>
+          </a:fontRef>
+        </p:style>
+        <p:txBody>
+          <a:bodyPr rtlCol="0" anchor="ctr" lIns="164592" rIns="164592" tIns="109728" bIns="109728" wrap="square"/>
+          <a:lstStyle/>
+          <a:p>
+            <a:pPr algn="l">
+              <a:spcAft>
+                <a:spcPts val="100"/>
+              </a:spcAft>
+            </a:pPr>
+            <a:r>
+              <a:rPr sz="1300" b="1" i="0">
+                <a:solidFill>
+                  <a:srgbClr val="1A1D27"/>
+                </a:solidFill>
+                <a:latin typeface="Calibri"/>
+              </a:rPr>
+              <a:t>Capi fantasma</a:t>
+            </a:r>
+          </a:p>
+          <a:p>
+            <a:pPr algn="l">
+              <a:spcAft>
+                <a:spcPts val="400"/>
+              </a:spcAft>
+            </a:pPr>
+            <a:r>
+              <a:rPr sz="900" b="0" i="1">
+                <a:solidFill>
+                  <a:srgbClr val="C88B2E"/>
+                </a:solidFill>
+                <a:latin typeface="Calibri"/>
+              </a:rPr>
+              <a:t>regola soglia</a:t>
+            </a:r>
+          </a:p>
+          <a:p>
+            <a:pPr algn="l">
+              <a:spcAft>
+                <a:spcPts val="400"/>
+              </a:spcAft>
+            </a:pPr>
+            <a:r>
+              <a:rPr sz="1050" b="0" i="0">
+                <a:solidFill>
+                  <a:srgbClr val="6B7182"/>
+                </a:solidFill>
+                <a:latin typeface="Calibri"/>
+              </a:rPr>
+              <a:t>→ mai indossati &gt; N giorni</a:t>
+            </a:r>
+          </a:p>
+        </p:txBody>
+      </p:sp>
+      <p:sp>
+        <p:nvSpPr>
+          <p:cNvPr id="14" name="TextBox 13"/>
           <p:cNvSpPr txBox="1"/>
           <p:nvPr/>
         </p:nvSpPr>
         <p:spPr>
           <a:xfrm>
-            <a:off x="6492240" y="4041648"/>
-            <a:ext cx="5486400" cy="365760"/>
+            <a:off x="548640" y="4754880"/>
+            <a:ext cx="10972800" cy="274320"/>
           </a:xfrm>
           <a:prstGeom prst="rect">
             <a:avLst/>
@@ -11531,62 +11794,118 @@
           <a:p>
             <a:pPr algn="l"/>
             <a:r>
-              <a:rPr sz="1100" b="0" i="1">
+              <a:rPr sz="1100" b="1" i="0">
+                <a:solidFill>
+                  <a:srgbClr val="1A1D27"/>
+                </a:solidFill>
+                <a:latin typeface="Calibri"/>
+              </a:rPr>
+              <a:t>🧩  TUTTO IL GUARDAROBA · sull'insieme</a:t>
+            </a:r>
+          </a:p>
+        </p:txBody>
+      </p:sp>
+      <p:sp>
+        <p:nvSpPr>
+          <p:cNvPr id="15" name="Rounded Rectangle 14"/>
+          <p:cNvSpPr/>
+          <p:nvPr/>
+        </p:nvSpPr>
+        <p:spPr>
+          <a:xfrm>
+            <a:off x="548640" y="5029200"/>
+            <a:ext cx="3657600" cy="1143000"/>
+          </a:xfrm>
+          <a:prstGeom prst="roundRect">
+            <a:avLst/>
+          </a:prstGeom>
+          <a:solidFill>
+            <a:srgbClr val="E0E8FA"/>
+          </a:solidFill>
+          <a:ln w="9525">
+            <a:solidFill>
+              <a:srgbClr val="4A6DDC"/>
+            </a:solidFill>
+          </a:ln>
+          <a:effectLst/>
+        </p:spPr>
+        <p:style>
+          <a:lnRef idx="1">
+            <a:schemeClr val="accent1"/>
+          </a:lnRef>
+          <a:fillRef idx="3">
+            <a:schemeClr val="accent1"/>
+          </a:fillRef>
+          <a:effectRef idx="2">
+            <a:schemeClr val="accent1"/>
+          </a:effectRef>
+          <a:fontRef idx="minor">
+            <a:schemeClr val="lt1"/>
+          </a:fontRef>
+        </p:style>
+        <p:txBody>
+          <a:bodyPr rtlCol="0" anchor="ctr" lIns="164592" rIns="164592" tIns="109728" bIns="109728" wrap="square"/>
+          <a:lstStyle/>
+          <a:p>
+            <a:pPr algn="l">
+              <a:spcAft>
+                <a:spcPts val="100"/>
+              </a:spcAft>
+            </a:pPr>
+            <a:r>
+              <a:rPr sz="1300" b="1" i="0">
+                <a:solidFill>
+                  <a:srgbClr val="1A1D27"/>
+                </a:solidFill>
+                <a:latin typeface="Calibri"/>
+              </a:rPr>
+              <a:t>Outfit recommender</a:t>
+            </a:r>
+          </a:p>
+          <a:p>
+            <a:pPr algn="l">
+              <a:spcAft>
+                <a:spcPts val="400"/>
+              </a:spcAft>
+            </a:pPr>
+            <a:r>
+              <a:rPr sz="900" b="0" i="1">
+                <a:solidFill>
+                  <a:srgbClr val="4A6DDC"/>
+                </a:solidFill>
+                <a:latin typeface="Calibri"/>
+              </a:rPr>
+              <a:t>regole + AI + 🌦 meteo</a:t>
+            </a:r>
+          </a:p>
+          <a:p>
+            <a:pPr algn="l">
+              <a:spcAft>
+                <a:spcPts val="400"/>
+              </a:spcAft>
+            </a:pPr>
+            <a:r>
+              <a:rPr sz="1050" b="0" i="0">
                 <a:solidFill>
                   <a:srgbClr val="6B7182"/>
                 </a:solidFill>
                 <a:latin typeface="Calibri"/>
               </a:rPr>
-              <a:t>le etichette di ogni capo si accumulano nel guardaroba</a:t>
-            </a:r>
-          </a:p>
-        </p:txBody>
-      </p:sp>
-      <p:sp>
-        <p:nvSpPr>
-          <p:cNvPr id="12" name="TextBox 11"/>
-          <p:cNvSpPr txBox="1"/>
-          <p:nvPr/>
-        </p:nvSpPr>
-        <p:spPr>
-          <a:xfrm>
-            <a:off x="548640" y="4526280"/>
-            <a:ext cx="10972800" cy="320040"/>
-          </a:xfrm>
-          <a:prstGeom prst="rect">
-            <a:avLst/>
-          </a:prstGeom>
-          <a:noFill/>
-        </p:spPr>
-        <p:txBody>
-          <a:bodyPr wrap="square" lIns="0" rIns="0" tIns="0" bIns="0">
-            <a:spAutoFit/>
-          </a:bodyPr>
-          <a:lstStyle/>
-          <a:p>
-            <a:pPr algn="l"/>
-            <a:r>
-              <a:rPr sz="1200" b="1" i="0">
-                <a:solidFill>
-                  <a:srgbClr val="1A1D27"/>
-                </a:solidFill>
-                <a:latin typeface="Calibri"/>
-              </a:rPr>
-              <a:t>🧩  SU TUTTO IL GUARDAROBA · sull'insieme dei capi</a:t>
-            </a:r>
-          </a:p>
-        </p:txBody>
-      </p:sp>
-      <p:sp>
-        <p:nvSpPr>
-          <p:cNvPr id="13" name="Rounded Rectangle 12"/>
+              <a:t>→ "cosa metto oggi?" · 3 proposte</a:t>
+            </a:r>
+          </a:p>
+        </p:txBody>
+      </p:sp>
+      <p:sp>
+        <p:nvSpPr>
+          <p:cNvPr id="16" name="Rounded Rectangle 15"/>
           <p:cNvSpPr/>
           <p:nvPr/>
         </p:nvSpPr>
         <p:spPr>
           <a:xfrm>
-            <a:off x="548640" y="4892040"/>
-            <a:ext cx="5532120" cy="1280160"/>
+            <a:off x="4361688" y="5029200"/>
+            <a:ext cx="3657600" cy="1143000"/>
           </a:xfrm>
           <a:prstGeom prst="roundRect">
             <a:avLst/>
@@ -11621,11 +11940,11 @@
           <a:p>
             <a:pPr algn="l">
               <a:spcAft>
-                <a:spcPts val="200"/>
-              </a:spcAft>
-            </a:pPr>
-            <a:r>
-              <a:rPr sz="1500" b="1" i="0">
+                <a:spcPts val="100"/>
+              </a:spcAft>
+            </a:pPr>
+            <a:r>
+              <a:rPr sz="1300" b="1" i="0">
                 <a:solidFill>
                   <a:srgbClr val="1A1D27"/>
                 </a:solidFill>
@@ -11637,17 +11956,17 @@
           <a:p>
             <a:pPr algn="l">
               <a:spcAft>
-                <a:spcPts val="600"/>
-              </a:spcAft>
-            </a:pPr>
-            <a:r>
-              <a:rPr sz="1000" b="0" i="1">
+                <a:spcPts val="400"/>
+              </a:spcAft>
+            </a:pPr>
+            <a:r>
+              <a:rPr sz="900" b="0" i="1">
                 <a:solidFill>
                   <a:srgbClr val="2F8F6E"/>
                 </a:solidFill>
                 <a:latin typeface="Calibri"/>
               </a:rPr>
-              <a:t>addestrata da noi · non guarda le foto, guarda l'inventario</a:t>
+              <a:t>addestrata da noi</a:t>
             </a:r>
           </a:p>
           <a:p>
@@ -11657,27 +11976,27 @@
               </a:spcAft>
             </a:pPr>
             <a:r>
-              <a:rPr sz="1200" b="0" i="0">
+              <a:rPr sz="1050" b="0" i="0">
                 <a:solidFill>
                   <a:srgbClr val="6B7182"/>
                 </a:solidFill>
                 <a:latin typeface="Calibri"/>
               </a:rPr>
-              <a:t>→ vuoti funzionali: "manca una giacca", "troppe t-shirt"</a:t>
-            </a:r>
-          </a:p>
-        </p:txBody>
-      </p:sp>
-      <p:sp>
-        <p:nvSpPr>
-          <p:cNvPr id="14" name="Rounded Rectangle 13"/>
+              <a:t>→ vuoti: "manca una giacca"</a:t>
+            </a:r>
+          </a:p>
+        </p:txBody>
+      </p:sp>
+      <p:sp>
+        <p:nvSpPr>
+          <p:cNvPr id="17" name="Rounded Rectangle 16"/>
           <p:cNvSpPr/>
           <p:nvPr/>
         </p:nvSpPr>
         <p:spPr>
           <a:xfrm>
-            <a:off x="6263640" y="4892040"/>
-            <a:ext cx="5532120" cy="1280160"/>
+            <a:off x="8174736" y="5029200"/>
+            <a:ext cx="3657600" cy="1143000"/>
           </a:xfrm>
           <a:prstGeom prst="roundRect">
             <a:avLst/>
@@ -11712,11 +12031,11 @@
           <a:p>
             <a:pPr algn="l">
               <a:spcAft>
-                <a:spcPts val="200"/>
-              </a:spcAft>
-            </a:pPr>
-            <a:r>
-              <a:rPr sz="1500" b="1" i="0">
+                <a:spcPts val="100"/>
+              </a:spcAft>
+            </a:pPr>
+            <a:r>
+              <a:rPr sz="1300" b="1" i="0">
                 <a:solidFill>
                   <a:srgbClr val="1A1D27"/>
                 </a:solidFill>
@@ -11728,17 +12047,17 @@
           <a:p>
             <a:pPr algn="l">
               <a:spcAft>
-                <a:spcPts val="600"/>
-              </a:spcAft>
-            </a:pPr>
-            <a:r>
-              <a:rPr sz="1000" b="0" i="1">
+                <a:spcPts val="400"/>
+              </a:spcAft>
+            </a:pPr>
+            <a:r>
+              <a:rPr sz="900" b="0" i="1">
                 <a:solidFill>
                   <a:srgbClr val="2F8F6E"/>
                 </a:solidFill>
                 <a:latin typeface="Calibri"/>
               </a:rPr>
-              <a:t>azioni circolari × % di CO₂ risparmiata</a:t>
+              <a:t>azioni × % CO₂</a:t>
             </a:r>
           </a:p>
           <a:p>
@@ -11748,20 +12067,20 @@
               </a:spcAft>
             </a:pPr>
             <a:r>
-              <a:rPr sz="1200" b="0" i="0">
+              <a:rPr sz="1050" b="0" i="0">
                 <a:solidFill>
                   <a:srgbClr val="6B7182"/>
                 </a:solidFill>
                 <a:latin typeface="Calibri"/>
               </a:rPr>
-              <a:t>→ CO₂ totale evitata, mostrata nella dashboard impatto</a:t>
-            </a:r>
-          </a:p>
-        </p:txBody>
-      </p:sp>
-      <p:sp>
-        <p:nvSpPr>
-          <p:cNvPr id="15" name="TextBox 14"/>
+              <a:t>→ CO₂ totale → dashboard</a:t>
+            </a:r>
+          </a:p>
+        </p:txBody>
+      </p:sp>
+      <p:sp>
+        <p:nvSpPr>
+          <p:cNvPr id="18" name="TextBox 17"/>
           <p:cNvSpPr txBox="1"/>
           <p:nvPr/>
         </p:nvSpPr>
@@ -11796,7 +12115,7 @@
       </p:sp>
       <p:sp>
         <p:nvSpPr>
-          <p:cNvPr id="16" name="TextBox 15"/>
+          <p:cNvPr id="19" name="TextBox 18"/>
           <p:cNvSpPr txBox="1"/>
           <p:nvPr/>
         </p:nvSpPr>

--- a/docs/presentation.pptx
+++ b/docs/presentation.pptx
@@ -6,20 +6,20 @@
   </p:sldMasterIdLst>
   <p:sldIdLst>
     <p:sldId id="256" r:id="rId7"/>
-    <p:sldId id="257" r:id="rId8"/>
-    <p:sldId id="258" r:id="rId9"/>
-    <p:sldId id="259" r:id="rId10"/>
-    <p:sldId id="260" r:id="rId11"/>
-    <p:sldId id="261" r:id="rId12"/>
-    <p:sldId id="262" r:id="rId13"/>
-    <p:sldId id="263" r:id="rId14"/>
-    <p:sldId id="264" r:id="rId15"/>
-    <p:sldId id="265" r:id="rId16"/>
-    <p:sldId id="266" r:id="rId17"/>
-    <p:sldId id="267" r:id="rId18"/>
-    <p:sldId id="268" r:id="rId19"/>
-    <p:sldId id="269" r:id="rId20"/>
-    <p:sldId id="270" r:id="rId21"/>
+    <p:sldId id="257" r:id="rId9"/>
+    <p:sldId id="258" r:id="rId10"/>
+    <p:sldId id="259" r:id="rId11"/>
+    <p:sldId id="260" r:id="rId12"/>
+    <p:sldId id="261" r:id="rId13"/>
+    <p:sldId id="262" r:id="rId14"/>
+    <p:sldId id="263" r:id="rId15"/>
+    <p:sldId id="264" r:id="rId16"/>
+    <p:sldId id="265" r:id="rId17"/>
+    <p:sldId id="266" r:id="rId18"/>
+    <p:sldId id="267" r:id="rId19"/>
+    <p:sldId id="268" r:id="rId20"/>
+    <p:sldId id="269" r:id="rId21"/>
+    <p:sldId id="270" r:id="rId22"/>
   </p:sldIdLst>
   <p:sldSz cx="12191695" cy="6858000" type="screen4x3"/>
   <p:notesSz cx="6858000" cy="9144000"/>
@@ -119,6 +119,1406 @@
     </a:lvl9pPr>
   </p:defaultTextStyle>
 </p:presentation>
+</file>
+
+<file path=ppt/notesMasters/notesMaster1.xml><?xml version="1.0" encoding="utf-8"?>
+<p:notesMaster xmlns:a="http://schemas.openxmlformats.org/drawingml/2006/main" xmlns:p="http://schemas.openxmlformats.org/presentationml/2006/main" xmlns:r="http://schemas.openxmlformats.org/officeDocument/2006/relationships">
+  <p:cSld>
+    <p:bg>
+      <p:bgRef idx="1001">
+        <a:schemeClr val="bg1"/>
+      </p:bgRef>
+    </p:bg>
+    <p:spTree>
+      <p:nvGrpSpPr>
+        <p:cNvPr id="1" name=""/>
+        <p:cNvGrpSpPr/>
+        <p:nvPr/>
+      </p:nvGrpSpPr>
+      <p:grpSpPr>
+        <a:xfrm>
+          <a:off x="0" y="0"/>
+          <a:ext cx="0" cy="0"/>
+          <a:chOff x="0" y="0"/>
+          <a:chExt cx="0" cy="0"/>
+        </a:xfrm>
+      </p:grpSpPr>
+      <p:sp>
+        <p:nvSpPr>
+          <p:cNvPr id="2" name="Header Placeholder 1"/>
+          <p:cNvSpPr>
+            <a:spLocks noGrp="1"/>
+          </p:cNvSpPr>
+          <p:nvPr>
+            <p:ph type="hdr" sz="quarter"/>
+          </p:nvPr>
+        </p:nvSpPr>
+        <p:spPr>
+          <a:xfrm>
+            <a:off x="0" y="0"/>
+            <a:ext cx="2971800" cy="457200"/>
+          </a:xfrm>
+          <a:prstGeom prst="rect">
+            <a:avLst/>
+          </a:prstGeom>
+        </p:spPr>
+        <p:txBody>
+          <a:bodyPr vert="horz" lIns="91440" tIns="45720" rIns="91440" bIns="45720" rtlCol="0"/>
+          <a:lstStyle>
+            <a:lvl1pPr algn="l">
+              <a:defRPr sz="1200"/>
+            </a:lvl1pPr>
+          </a:lstStyle>
+          <a:p>
+            <a:endParaRPr lang="en-US"/>
+          </a:p>
+        </p:txBody>
+      </p:sp>
+      <p:sp>
+        <p:nvSpPr>
+          <p:cNvPr id="3" name="Date Placeholder 2"/>
+          <p:cNvSpPr>
+            <a:spLocks noGrp="1"/>
+          </p:cNvSpPr>
+          <p:nvPr>
+            <p:ph type="dt" idx="1"/>
+          </p:nvPr>
+        </p:nvSpPr>
+        <p:spPr>
+          <a:xfrm>
+            <a:off x="3884613" y="0"/>
+            <a:ext cx="2971800" cy="457200"/>
+          </a:xfrm>
+          <a:prstGeom prst="rect">
+            <a:avLst/>
+          </a:prstGeom>
+        </p:spPr>
+        <p:txBody>
+          <a:bodyPr vert="horz" lIns="91440" tIns="45720" rIns="91440" bIns="45720" rtlCol="0"/>
+          <a:lstStyle>
+            <a:lvl1pPr algn="r">
+              <a:defRPr sz="1200"/>
+            </a:lvl1pPr>
+          </a:lstStyle>
+          <a:p>
+            <a:fld id="{0F89C1C7-3DCD-1040-A9CF-14679D8B5DDD}" type="datetimeFigureOut">
+              <a:rPr lang="en-US" smtClean="0"/>
+              <a:t>10/17/16</a:t>
+            </a:fld>
+            <a:endParaRPr lang="en-US"/>
+          </a:p>
+        </p:txBody>
+      </p:sp>
+      <p:sp>
+        <p:nvSpPr>
+          <p:cNvPr id="4" name="Slide Image Placeholder 3"/>
+          <p:cNvSpPr>
+            <a:spLocks noGrp="1" noRot="1" noChangeAspect="1"/>
+          </p:cNvSpPr>
+          <p:nvPr>
+            <p:ph type="sldImg" idx="2"/>
+          </p:nvPr>
+        </p:nvSpPr>
+        <p:spPr>
+          <a:xfrm>
+            <a:off x="1143000" y="685800"/>
+            <a:ext cx="4572000" cy="3429000"/>
+          </a:xfrm>
+          <a:prstGeom prst="rect">
+            <a:avLst/>
+          </a:prstGeom>
+          <a:noFill/>
+          <a:ln w="12700">
+            <a:solidFill>
+              <a:prstClr val="black"/>
+            </a:solidFill>
+          </a:ln>
+        </p:spPr>
+        <p:txBody>
+          <a:bodyPr vert="horz" lIns="91440" tIns="45720" rIns="91440" bIns="45720" rtlCol="0" anchor="ctr"/>
+          <a:lstStyle/>
+          <a:p>
+            <a:endParaRPr lang="en-US"/>
+          </a:p>
+        </p:txBody>
+      </p:sp>
+      <p:sp>
+        <p:nvSpPr>
+          <p:cNvPr id="5" name="Notes Placeholder 4"/>
+          <p:cNvSpPr>
+            <a:spLocks noGrp="1"/>
+          </p:cNvSpPr>
+          <p:nvPr>
+            <p:ph type="body" sz="quarter" idx="3"/>
+          </p:nvPr>
+        </p:nvSpPr>
+        <p:spPr>
+          <a:xfrm>
+            <a:off x="685800" y="4343400"/>
+            <a:ext cx="5486400" cy="4114800"/>
+          </a:xfrm>
+          <a:prstGeom prst="rect">
+            <a:avLst/>
+          </a:prstGeom>
+        </p:spPr>
+        <p:txBody>
+          <a:bodyPr vert="horz" lIns="91440" tIns="45720" rIns="91440" bIns="45720" rtlCol="0"/>
+          <a:lstStyle/>
+          <a:p>
+            <a:pPr lvl="0"/>
+            <a:r>
+              <a:rPr lang="en-US" smtClean="0"/>
+              <a:t>Click to edit Master text styles</a:t>
+            </a:r>
+          </a:p>
+          <a:p>
+            <a:pPr lvl="1"/>
+            <a:r>
+              <a:rPr lang="en-US" smtClean="0"/>
+              <a:t>Second level</a:t>
+            </a:r>
+          </a:p>
+          <a:p>
+            <a:pPr lvl="2"/>
+            <a:r>
+              <a:rPr lang="en-US" smtClean="0"/>
+              <a:t>Third level</a:t>
+            </a:r>
+          </a:p>
+          <a:p>
+            <a:pPr lvl="3"/>
+            <a:r>
+              <a:rPr lang="en-US" smtClean="0"/>
+              <a:t>Fourth level</a:t>
+            </a:r>
+          </a:p>
+          <a:p>
+            <a:pPr lvl="4"/>
+            <a:r>
+              <a:rPr lang="en-US" smtClean="0"/>
+              <a:t>Fifth level</a:t>
+            </a:r>
+            <a:endParaRPr lang="en-US"/>
+          </a:p>
+        </p:txBody>
+      </p:sp>
+      <p:sp>
+        <p:nvSpPr>
+          <p:cNvPr id="6" name="Footer Placeholder 5"/>
+          <p:cNvSpPr>
+            <a:spLocks noGrp="1"/>
+          </p:cNvSpPr>
+          <p:nvPr>
+            <p:ph type="ftr" sz="quarter" idx="4"/>
+          </p:nvPr>
+        </p:nvSpPr>
+        <p:spPr>
+          <a:xfrm>
+            <a:off x="0" y="8685213"/>
+            <a:ext cx="2971800" cy="457200"/>
+          </a:xfrm>
+          <a:prstGeom prst="rect">
+            <a:avLst/>
+          </a:prstGeom>
+        </p:spPr>
+        <p:txBody>
+          <a:bodyPr vert="horz" lIns="91440" tIns="45720" rIns="91440" bIns="45720" rtlCol="0" anchor="b"/>
+          <a:lstStyle>
+            <a:lvl1pPr algn="l">
+              <a:defRPr sz="1200"/>
+            </a:lvl1pPr>
+          </a:lstStyle>
+          <a:p>
+            <a:endParaRPr lang="en-US"/>
+          </a:p>
+        </p:txBody>
+      </p:sp>
+      <p:sp>
+        <p:nvSpPr>
+          <p:cNvPr id="7" name="Slide Number Placeholder 6"/>
+          <p:cNvSpPr>
+            <a:spLocks noGrp="1"/>
+          </p:cNvSpPr>
+          <p:nvPr>
+            <p:ph type="sldNum" sz="quarter" idx="5"/>
+          </p:nvPr>
+        </p:nvSpPr>
+        <p:spPr>
+          <a:xfrm>
+            <a:off x="3884613" y="8685213"/>
+            <a:ext cx="2971800" cy="457200"/>
+          </a:xfrm>
+          <a:prstGeom prst="rect">
+            <a:avLst/>
+          </a:prstGeom>
+        </p:spPr>
+        <p:txBody>
+          <a:bodyPr vert="horz" lIns="91440" tIns="45720" rIns="91440" bIns="45720" rtlCol="0" anchor="b"/>
+          <a:lstStyle>
+            <a:lvl1pPr algn="r">
+              <a:defRPr sz="1200"/>
+            </a:lvl1pPr>
+          </a:lstStyle>
+          <a:p>
+            <a:fld id="{BB5E49A5-4136-284D-997B-48E1D791AD67}" type="slidenum">
+              <a:rPr lang="en-US" smtClean="0"/>
+              <a:t>‹#›</a:t>
+            </a:fld>
+            <a:endParaRPr lang="en-US"/>
+          </a:p>
+        </p:txBody>
+      </p:sp>
+    </p:spTree>
+    <p:extLst>
+      <p:ext uri="{BB962C8B-B14F-4D97-AF65-F5344CB8AC3E}">
+        <p14:creationId xmlns:p14="http://schemas.microsoft.com/office/powerpoint/2010/main" val="2623252185"/>
+      </p:ext>
+    </p:extLst>
+  </p:cSld>
+  <p:clrMap bg1="lt1" tx1="dk1" bg2="lt2" tx2="dk2" accent1="accent1" accent2="accent2" accent3="accent3" accent4="accent4" accent5="accent5" accent6="accent6" hlink="hlink" folHlink="folHlink"/>
+  <p:notesStyle>
+    <a:lvl1pPr marL="0" algn="l" defTabSz="457200" rtl="0" eaLnBrk="1" latinLnBrk="0" hangingPunct="1">
+      <a:defRPr sz="1200" kern="1200">
+        <a:solidFill>
+          <a:schemeClr val="tx1"/>
+        </a:solidFill>
+        <a:latin typeface="+mn-lt"/>
+        <a:ea typeface="+mn-ea"/>
+        <a:cs typeface="+mn-cs"/>
+      </a:defRPr>
+    </a:lvl1pPr>
+    <a:lvl2pPr marL="457200" algn="l" defTabSz="457200" rtl="0" eaLnBrk="1" latinLnBrk="0" hangingPunct="1">
+      <a:defRPr sz="1200" kern="1200">
+        <a:solidFill>
+          <a:schemeClr val="tx1"/>
+        </a:solidFill>
+        <a:latin typeface="+mn-lt"/>
+        <a:ea typeface="+mn-ea"/>
+        <a:cs typeface="+mn-cs"/>
+      </a:defRPr>
+    </a:lvl2pPr>
+    <a:lvl3pPr marL="914400" algn="l" defTabSz="457200" rtl="0" eaLnBrk="1" latinLnBrk="0" hangingPunct="1">
+      <a:defRPr sz="1200" kern="1200">
+        <a:solidFill>
+          <a:schemeClr val="tx1"/>
+        </a:solidFill>
+        <a:latin typeface="+mn-lt"/>
+        <a:ea typeface="+mn-ea"/>
+        <a:cs typeface="+mn-cs"/>
+      </a:defRPr>
+    </a:lvl3pPr>
+    <a:lvl4pPr marL="1371600" algn="l" defTabSz="457200" rtl="0" eaLnBrk="1" latinLnBrk="0" hangingPunct="1">
+      <a:defRPr sz="1200" kern="1200">
+        <a:solidFill>
+          <a:schemeClr val="tx1"/>
+        </a:solidFill>
+        <a:latin typeface="+mn-lt"/>
+        <a:ea typeface="+mn-ea"/>
+        <a:cs typeface="+mn-cs"/>
+      </a:defRPr>
+    </a:lvl4pPr>
+    <a:lvl5pPr marL="1828800" algn="l" defTabSz="457200" rtl="0" eaLnBrk="1" latinLnBrk="0" hangingPunct="1">
+      <a:defRPr sz="1200" kern="1200">
+        <a:solidFill>
+          <a:schemeClr val="tx1"/>
+        </a:solidFill>
+        <a:latin typeface="+mn-lt"/>
+        <a:ea typeface="+mn-ea"/>
+        <a:cs typeface="+mn-cs"/>
+      </a:defRPr>
+    </a:lvl5pPr>
+    <a:lvl6pPr marL="2286000" algn="l" defTabSz="457200" rtl="0" eaLnBrk="1" latinLnBrk="0" hangingPunct="1">
+      <a:defRPr sz="1200" kern="1200">
+        <a:solidFill>
+          <a:schemeClr val="tx1"/>
+        </a:solidFill>
+        <a:latin typeface="+mn-lt"/>
+        <a:ea typeface="+mn-ea"/>
+        <a:cs typeface="+mn-cs"/>
+      </a:defRPr>
+    </a:lvl6pPr>
+    <a:lvl7pPr marL="2743200" algn="l" defTabSz="457200" rtl="0" eaLnBrk="1" latinLnBrk="0" hangingPunct="1">
+      <a:defRPr sz="1200" kern="1200">
+        <a:solidFill>
+          <a:schemeClr val="tx1"/>
+        </a:solidFill>
+        <a:latin typeface="+mn-lt"/>
+        <a:ea typeface="+mn-ea"/>
+        <a:cs typeface="+mn-cs"/>
+      </a:defRPr>
+    </a:lvl7pPr>
+    <a:lvl8pPr marL="3200400" algn="l" defTabSz="457200" rtl="0" eaLnBrk="1" latinLnBrk="0" hangingPunct="1">
+      <a:defRPr sz="1200" kern="1200">
+        <a:solidFill>
+          <a:schemeClr val="tx1"/>
+        </a:solidFill>
+        <a:latin typeface="+mn-lt"/>
+        <a:ea typeface="+mn-ea"/>
+        <a:cs typeface="+mn-cs"/>
+      </a:defRPr>
+    </a:lvl8pPr>
+    <a:lvl9pPr marL="3657600" algn="l" defTabSz="457200" rtl="0" eaLnBrk="1" latinLnBrk="0" hangingPunct="1">
+      <a:defRPr sz="1200" kern="1200">
+        <a:solidFill>
+          <a:schemeClr val="tx1"/>
+        </a:solidFill>
+        <a:latin typeface="+mn-lt"/>
+        <a:ea typeface="+mn-ea"/>
+        <a:cs typeface="+mn-cs"/>
+      </a:defRPr>
+    </a:lvl9pPr>
+  </p:notesStyle>
+</p:notesMaster>
+</file>
+
+<file path=ppt/notesSlides/notesSlide1.xml><?xml version="1.0" encoding="utf-8"?>
+<p:notes xmlns:a="http://schemas.openxmlformats.org/drawingml/2006/main" xmlns:p="http://schemas.openxmlformats.org/presentationml/2006/main" xmlns:r="http://schemas.openxmlformats.org/officeDocument/2006/relationships">
+  <p:cSld>
+    <p:spTree>
+      <p:nvGrpSpPr>
+        <p:cNvPr id="1" name=""/>
+        <p:cNvGrpSpPr/>
+        <p:nvPr/>
+      </p:nvGrpSpPr>
+      <p:grpSpPr>
+        <a:xfrm>
+          <a:off x="0" y="0"/>
+          <a:ext cx="0" cy="0"/>
+          <a:chOff x="0" y="0"/>
+          <a:chExt cx="0" cy="0"/>
+        </a:xfrm>
+      </p:grpSpPr>
+      <p:sp>
+        <p:nvSpPr>
+          <p:cNvPr id="2" name="Slide Image Placeholder 1"/>
+          <p:cNvSpPr>
+            <a:spLocks noGrp="1"/>
+          </p:cNvSpPr>
+          <p:nvPr>
+            <p:ph type="sldImg" idx="2"/>
+          </p:nvPr>
+        </p:nvSpPr>
+        <p:spPr/>
+      </p:sp>
+      <p:sp>
+        <p:nvSpPr>
+          <p:cNvPr id="3" name="Notes Placeholder 2"/>
+          <p:cNvSpPr>
+            <a:spLocks noGrp="1"/>
+          </p:cNvSpPr>
+          <p:nvPr>
+            <p:ph type="body" idx="3" sz="quarter"/>
+          </p:nvPr>
+        </p:nvSpPr>
+        <p:spPr/>
+        <p:txBody>
+          <a:bodyPr/>
+          <a:lstStyle/>
+          <a:p>
+            <a:r>
+              <a:t>Buongiorno, presento ClosetAI: un guardaroba intelligente che aiuta a vestire meglio comprando meno. Il prototipo copre l'intero ciclo di vita di un capo — dalla foto al fine vita — e lo racconto come una storia in sei tappe. A ogni tappa mostro due cose: cosa vede e fa l'utente, e cosa succede dietro le quinte a livello tecnico. È il filo conduttore di tutta la presentazione, quindi lo terrò esplicito slide per slide.</a:t>
+            </a:r>
+          </a:p>
+        </p:txBody>
+      </p:sp>
+      <p:sp>
+        <p:nvSpPr>
+          <p:cNvPr id="4" name="Slide Number Placeholder 3"/>
+          <p:cNvSpPr>
+            <a:spLocks noGrp="1"/>
+          </p:cNvSpPr>
+          <p:nvPr>
+            <p:ph type="sldNum" idx="5" sz="quarter"/>
+          </p:nvPr>
+        </p:nvSpPr>
+        <p:spPr/>
+      </p:sp>
+    </p:spTree>
+  </p:cSld>
+  <p:clrMapOvr>
+    <a:masterClrMapping/>
+  </p:clrMapOvr>
+</p:notes>
+</file>
+
+<file path=ppt/notesSlides/notesSlide10.xml><?xml version="1.0" encoding="utf-8"?>
+<p:notes xmlns:a="http://schemas.openxmlformats.org/drawingml/2006/main" xmlns:p="http://schemas.openxmlformats.org/presentationml/2006/main" xmlns:r="http://schemas.openxmlformats.org/officeDocument/2006/relationships">
+  <p:cSld>
+    <p:spTree>
+      <p:nvGrpSpPr>
+        <p:cNvPr id="1" name=""/>
+        <p:cNvGrpSpPr/>
+        <p:nvPr/>
+      </p:nvGrpSpPr>
+      <p:grpSpPr>
+        <a:xfrm>
+          <a:off x="0" y="0"/>
+          <a:ext cx="0" cy="0"/>
+          <a:chOff x="0" y="0"/>
+          <a:chExt cx="0" cy="0"/>
+        </a:xfrm>
+      </p:grpSpPr>
+      <p:sp>
+        <p:nvSpPr>
+          <p:cNvPr id="2" name="Slide Image Placeholder 1"/>
+          <p:cNvSpPr>
+            <a:spLocks noGrp="1"/>
+          </p:cNvSpPr>
+          <p:nvPr>
+            <p:ph type="sldImg" idx="2"/>
+          </p:nvPr>
+        </p:nvSpPr>
+        <p:spPr/>
+      </p:sp>
+      <p:sp>
+        <p:nvSpPr>
+          <p:cNvPr id="3" name="Notes Placeholder 2"/>
+          <p:cNvSpPr>
+            <a:spLocks noGrp="1"/>
+          </p:cNvSpPr>
+          <p:nvPr>
+            <p:ph type="body" idx="3" sz="quarter"/>
+          </p:nvPr>
+        </p:nvSpPr>
+        <p:spPr/>
+        <p:txBody>
+          <a:bodyPr/>
+          <a:lstStyle/>
+          <a:p>
+            <a:r>
+              <a:t>Tutte e sei le tappe convergono qui, nella dashboard impatto: CO₂ evitata tradotta in km d'auto risparmiati per renderla tangibile, capi salvati dalla discarica, il cost-per-wear di tutto il guardaroba, i vuoti funzionali da colmare o no, e un coach — questo sì AI generativa, un LLM via litellm — che scrive un consiglio personalizzato basato sui dati reali dell'utente. È il momento in cui la sostenibilità smette di essere un'affermazione astratta e diventa un numero personale e motivante.</a:t>
+            </a:r>
+          </a:p>
+        </p:txBody>
+      </p:sp>
+      <p:sp>
+        <p:nvSpPr>
+          <p:cNvPr id="4" name="Slide Number Placeholder 3"/>
+          <p:cNvSpPr>
+            <a:spLocks noGrp="1"/>
+          </p:cNvSpPr>
+          <p:nvPr>
+            <p:ph type="sldNum" idx="5" sz="quarter"/>
+          </p:nvPr>
+        </p:nvSpPr>
+        <p:spPr/>
+      </p:sp>
+    </p:spTree>
+  </p:cSld>
+  <p:clrMapOvr>
+    <a:masterClrMapping/>
+  </p:clrMapOvr>
+</p:notes>
+</file>
+
+<file path=ppt/notesSlides/notesSlide11.xml><?xml version="1.0" encoding="utf-8"?>
+<p:notes xmlns:a="http://schemas.openxmlformats.org/drawingml/2006/main" xmlns:p="http://schemas.openxmlformats.org/presentationml/2006/main" xmlns:r="http://schemas.openxmlformats.org/officeDocument/2006/relationships">
+  <p:cSld>
+    <p:spTree>
+      <p:nvGrpSpPr>
+        <p:cNvPr id="1" name=""/>
+        <p:cNvGrpSpPr/>
+        <p:nvPr/>
+      </p:nvGrpSpPr>
+      <p:grpSpPr>
+        <a:xfrm>
+          <a:off x="0" y="0"/>
+          <a:ext cx="0" cy="0"/>
+          <a:chOff x="0" y="0"/>
+          <a:chExt cx="0" cy="0"/>
+        </a:xfrm>
+      </p:grpSpPr>
+      <p:sp>
+        <p:nvSpPr>
+          <p:cNvPr id="2" name="Slide Image Placeholder 1"/>
+          <p:cNvSpPr>
+            <a:spLocks noGrp="1"/>
+          </p:cNvSpPr>
+          <p:nvPr>
+            <p:ph type="sldImg" idx="2"/>
+          </p:nvPr>
+        </p:nvSpPr>
+        <p:spPr/>
+      </p:sp>
+      <p:sp>
+        <p:nvSpPr>
+          <p:cNvPr id="3" name="Notes Placeholder 2"/>
+          <p:cNvSpPr>
+            <a:spLocks noGrp="1"/>
+          </p:cNvSpPr>
+          <p:nvPr>
+            <p:ph type="body" idx="3" sz="quarter"/>
+          </p:nvPr>
+        </p:nvSpPr>
+        <p:spPr/>
+        <p:txBody>
+          <a:bodyPr/>
+          <a:lstStyle/>
+          <a:p>
+            <a:r>
+              <a:t>Riassumo tutto in un'unica vista, su tre livelli. Per ogni singola foto lavorano tre motori: Fashion-CLIP pre-addestrato, la nostra rete dello stato, la tabella CO₂. Nel tempo, ogni 'indossato oggi' alimenta wear log, cost-per-wear e capi fantasma, tutta logica a regole. E sull'intero guardaroba lavorano l'outfit recommender e la rete di gap analysis, fino alla somma degli impatti evitati che arriva in dashboard. Il messaggio di questa slide è che nessun livello dipende da AI generativa nel suo cuore: quella la usiamo altrove, come supporto opzionale, non come collante indispensabile della pipeline.</a:t>
+            </a:r>
+          </a:p>
+        </p:txBody>
+      </p:sp>
+      <p:sp>
+        <p:nvSpPr>
+          <p:cNvPr id="4" name="Slide Number Placeholder 3"/>
+          <p:cNvSpPr>
+            <a:spLocks noGrp="1"/>
+          </p:cNvSpPr>
+          <p:nvPr>
+            <p:ph type="sldNum" idx="5" sz="quarter"/>
+          </p:nvPr>
+        </p:nvSpPr>
+        <p:spPr/>
+      </p:sp>
+    </p:spTree>
+  </p:cSld>
+  <p:clrMapOvr>
+    <a:masterClrMapping/>
+  </p:clrMapOvr>
+</p:notes>
+</file>
+
+<file path=ppt/notesSlides/notesSlide12.xml><?xml version="1.0" encoding="utf-8"?>
+<p:notes xmlns:a="http://schemas.openxmlformats.org/drawingml/2006/main" xmlns:p="http://schemas.openxmlformats.org/presentationml/2006/main" xmlns:r="http://schemas.openxmlformats.org/officeDocument/2006/relationships">
+  <p:cSld>
+    <p:spTree>
+      <p:nvGrpSpPr>
+        <p:cNvPr id="1" name=""/>
+        <p:cNvGrpSpPr/>
+        <p:nvPr/>
+      </p:nvGrpSpPr>
+      <p:grpSpPr>
+        <a:xfrm>
+          <a:off x="0" y="0"/>
+          <a:ext cx="0" cy="0"/>
+          <a:chOff x="0" y="0"/>
+          <a:chExt cx="0" cy="0"/>
+        </a:xfrm>
+      </p:grpSpPr>
+      <p:sp>
+        <p:nvSpPr>
+          <p:cNvPr id="2" name="Slide Image Placeholder 1"/>
+          <p:cNvSpPr>
+            <a:spLocks noGrp="1"/>
+          </p:cNvSpPr>
+          <p:nvPr>
+            <p:ph type="sldImg" idx="2"/>
+          </p:nvPr>
+        </p:nvSpPr>
+        <p:spPr/>
+      </p:sp>
+      <p:sp>
+        <p:nvSpPr>
+          <p:cNvPr id="3" name="Notes Placeholder 2"/>
+          <p:cNvSpPr>
+            <a:spLocks noGrp="1"/>
+          </p:cNvSpPr>
+          <p:nvPr>
+            <p:ph type="body" idx="3" sz="quarter"/>
+          </p:nvPr>
+        </p:nvSpPr>
+        <p:spPr/>
+        <p:txBody>
+          <a:bodyPr/>
+          <a:lstStyle/>
+          <a:p>
+            <a:r>
+              <a:t>Questa è la tesi tecnica del progetto: non 'AI ovunque', ma lo strumento giusto per ogni problema, e la disciplina di sapere quando NON usare AI. Pre-addestrata quando il problema è generale e già risolto da altri su scala che non potremmo replicare. Allenata da noi quando il problema è specifico del nostro dominio — qui dimostriamo il know-how di machine learning vero e proprio. Generativa quando serve contenuto nuovo e personalizzato. Regole quando la relazione è già nota ed esatta. Una nota di onestà: avevamo prototipato anche un quarto approccio, un modello generativo che scriveva tutorial di riparazione dalla foto — funzionava, ma l'abbiamo rimosso in revisione perché il valore aggiunto non giustificava la complessità di due modelli vision-generativi extra da mantenere. Anche sapere cosa togliere è parte del metodo MVP first.</a:t>
+            </a:r>
+          </a:p>
+        </p:txBody>
+      </p:sp>
+      <p:sp>
+        <p:nvSpPr>
+          <p:cNvPr id="4" name="Slide Number Placeholder 3"/>
+          <p:cNvSpPr>
+            <a:spLocks noGrp="1"/>
+          </p:cNvSpPr>
+          <p:nvPr>
+            <p:ph type="sldNum" idx="5" sz="quarter"/>
+          </p:nvPr>
+        </p:nvSpPr>
+        <p:spPr/>
+      </p:sp>
+    </p:spTree>
+  </p:cSld>
+  <p:clrMapOvr>
+    <a:masterClrMapping/>
+  </p:clrMapOvr>
+</p:notes>
+</file>
+
+<file path=ppt/notesSlides/notesSlide13.xml><?xml version="1.0" encoding="utf-8"?>
+<p:notes xmlns:a="http://schemas.openxmlformats.org/drawingml/2006/main" xmlns:p="http://schemas.openxmlformats.org/presentationml/2006/main" xmlns:r="http://schemas.openxmlformats.org/officeDocument/2006/relationships">
+  <p:cSld>
+    <p:spTree>
+      <p:nvGrpSpPr>
+        <p:cNvPr id="1" name=""/>
+        <p:cNvGrpSpPr/>
+        <p:nvPr/>
+      </p:nvGrpSpPr>
+      <p:grpSpPr>
+        <a:xfrm>
+          <a:off x="0" y="0"/>
+          <a:ext cx="0" cy="0"/>
+          <a:chOff x="0" y="0"/>
+          <a:chExt cx="0" cy="0"/>
+        </a:xfrm>
+      </p:grpSpPr>
+      <p:sp>
+        <p:nvSpPr>
+          <p:cNvPr id="2" name="Slide Image Placeholder 1"/>
+          <p:cNvSpPr>
+            <a:spLocks noGrp="1"/>
+          </p:cNvSpPr>
+          <p:nvPr>
+            <p:ph type="sldImg" idx="2"/>
+          </p:nvPr>
+        </p:nvSpPr>
+        <p:spPr/>
+      </p:sp>
+      <p:sp>
+        <p:nvSpPr>
+          <p:cNvPr id="3" name="Notes Placeholder 2"/>
+          <p:cNvSpPr>
+            <a:spLocks noGrp="1"/>
+          </p:cNvSpPr>
+          <p:nvPr>
+            <p:ph type="body" idx="3" sz="quarter"/>
+          </p:nvPr>
+        </p:nvSpPr>
+        <p:spPr/>
+        <p:txBody>
+          <a:bodyPr/>
+          <a:lstStyle/>
+          <a:p>
+            <a:r>
+              <a:t>Un progetto universitario deve anche reggere la domanda 'si può portarlo sul mercato?'. Sui costi: hardware minimo — laptop e telefono — modelli AI gratuiti o open-source, e un costo cloud trascurabile grazie alla cache delle risposte LLM; lo specchio smart opzionale costa sui 200 euro una tantum in componenti Raspberry Pi. Sui materiali: stack interamente open-source, FastAPI, React, Fashion-CLIP, Stable Diffusion, PyTorch — nessun lock-in su un fornitore. Sulla scalabilità: partiamo single-user locale per l'MVP, ma il percorso verso multi-utente su cloud, AI on-device per la privacy, e un marketplace second-hand integrato è già chiaro.</a:t>
+            </a:r>
+          </a:p>
+        </p:txBody>
+      </p:sp>
+      <p:sp>
+        <p:nvSpPr>
+          <p:cNvPr id="4" name="Slide Number Placeholder 3"/>
+          <p:cNvSpPr>
+            <a:spLocks noGrp="1"/>
+          </p:cNvSpPr>
+          <p:nvPr>
+            <p:ph type="sldNum" idx="5" sz="quarter"/>
+          </p:nvPr>
+        </p:nvSpPr>
+        <p:spPr/>
+      </p:sp>
+    </p:spTree>
+  </p:cSld>
+  <p:clrMapOvr>
+    <a:masterClrMapping/>
+  </p:clrMapOvr>
+</p:notes>
+</file>
+
+<file path=ppt/notesSlides/notesSlide14.xml><?xml version="1.0" encoding="utf-8"?>
+<p:notes xmlns:a="http://schemas.openxmlformats.org/drawingml/2006/main" xmlns:p="http://schemas.openxmlformats.org/presentationml/2006/main" xmlns:r="http://schemas.openxmlformats.org/officeDocument/2006/relationships">
+  <p:cSld>
+    <p:spTree>
+      <p:nvGrpSpPr>
+        <p:cNvPr id="1" name=""/>
+        <p:cNvGrpSpPr/>
+        <p:nvPr/>
+      </p:nvGrpSpPr>
+      <p:grpSpPr>
+        <a:xfrm>
+          <a:off x="0" y="0"/>
+          <a:ext cx="0" cy="0"/>
+          <a:chOff x="0" y="0"/>
+          <a:chExt cx="0" cy="0"/>
+        </a:xfrm>
+      </p:grpSpPr>
+      <p:sp>
+        <p:nvSpPr>
+          <p:cNvPr id="2" name="Slide Image Placeholder 1"/>
+          <p:cNvSpPr>
+            <a:spLocks noGrp="1"/>
+          </p:cNvSpPr>
+          <p:nvPr>
+            <p:ph type="sldImg" idx="2"/>
+          </p:nvPr>
+        </p:nvSpPr>
+        <p:spPr/>
+      </p:sp>
+      <p:sp>
+        <p:nvSpPr>
+          <p:cNvPr id="3" name="Notes Placeholder 2"/>
+          <p:cNvSpPr>
+            <a:spLocks noGrp="1"/>
+          </p:cNvSpPr>
+          <p:nvPr>
+            <p:ph type="body" idx="3" sz="quarter"/>
+          </p:nvPr>
+        </p:nvSpPr>
+        <p:spPr/>
+        <p:txBody>
+          <a:bodyPr/>
+          <a:lstStyle/>
+          <a:p>
+            <a:r>
+              <a:t>Chiudo con onestà intellettuale, che per me è parte integrante del metodo, non un vezzo finale. I dataset delle reti che alleniamo noi restano parzialmente sintetici e vanno validati su dati reali — l'ho mostrato concretamente con la rete dello stato. Le stime CO₂ sono medie per categoria, non ancora per materiale. Il try-on è un'illusione visiva convincente ma non un vero camerino digitale. Ed è personale: oggi niente account condivisi. Le estensioni naturali sono altrettanto chiare: più foto reali, marketplace integrato, CO₂ per materiale, e uno specchio smart che elabora tutto on-device senza mai inviare foto in cloud — coerente col principio di privacy by design che abbiamo seguito fin dall'inizio.</a:t>
+            </a:r>
+          </a:p>
+        </p:txBody>
+      </p:sp>
+      <p:sp>
+        <p:nvSpPr>
+          <p:cNvPr id="4" name="Slide Number Placeholder 3"/>
+          <p:cNvSpPr>
+            <a:spLocks noGrp="1"/>
+          </p:cNvSpPr>
+          <p:nvPr>
+            <p:ph type="sldNum" idx="5" sz="quarter"/>
+          </p:nvPr>
+        </p:nvSpPr>
+        <p:spPr/>
+      </p:sp>
+    </p:spTree>
+  </p:cSld>
+  <p:clrMapOvr>
+    <a:masterClrMapping/>
+  </p:clrMapOvr>
+</p:notes>
+</file>
+
+<file path=ppt/notesSlides/notesSlide15.xml><?xml version="1.0" encoding="utf-8"?>
+<p:notes xmlns:a="http://schemas.openxmlformats.org/drawingml/2006/main" xmlns:p="http://schemas.openxmlformats.org/presentationml/2006/main" xmlns:r="http://schemas.openxmlformats.org/officeDocument/2006/relationships">
+  <p:cSld>
+    <p:spTree>
+      <p:nvGrpSpPr>
+        <p:cNvPr id="1" name=""/>
+        <p:cNvGrpSpPr/>
+        <p:nvPr/>
+      </p:nvGrpSpPr>
+      <p:grpSpPr>
+        <a:xfrm>
+          <a:off x="0" y="0"/>
+          <a:ext cx="0" cy="0"/>
+          <a:chOff x="0" y="0"/>
+          <a:chExt cx="0" cy="0"/>
+        </a:xfrm>
+      </p:grpSpPr>
+      <p:sp>
+        <p:nvSpPr>
+          <p:cNvPr id="2" name="Slide Image Placeholder 1"/>
+          <p:cNvSpPr>
+            <a:spLocks noGrp="1"/>
+          </p:cNvSpPr>
+          <p:nvPr>
+            <p:ph type="sldImg" idx="2"/>
+          </p:nvPr>
+        </p:nvSpPr>
+        <p:spPr/>
+      </p:sp>
+      <p:sp>
+        <p:nvSpPr>
+          <p:cNvPr id="3" name="Notes Placeholder 2"/>
+          <p:cNvSpPr>
+            <a:spLocks noGrp="1"/>
+          </p:cNvSpPr>
+          <p:nvPr>
+            <p:ph type="body" idx="3" sz="quarter"/>
+          </p:nvPr>
+        </p:nvSpPr>
+        <p:spPr/>
+        <p:txBody>
+          <a:bodyPr/>
+          <a:lstStyle/>
+          <a:p>
+            <a:r>
+              <a:t>Per chiudere: ClosetAI nasce da una storia in sei tappe, e in ogni tappa ho cercato lo strumento giusto per il problema — non l'AI più sofisticata possibile, ma quella più onesta. Un modello pre-addestrato dove il problema è già risolto, una rete nostra dove serve know-how specifico e l'abbiamo dimostrato con dati e validazione reali, l'AI generativa dove serve creare contenuto, le regole trasparenti dove la risposta è già nota. Grazie per l'attenzione, sono a disposizione per domande.</a:t>
+            </a:r>
+          </a:p>
+        </p:txBody>
+      </p:sp>
+      <p:sp>
+        <p:nvSpPr>
+          <p:cNvPr id="4" name="Slide Number Placeholder 3"/>
+          <p:cNvSpPr>
+            <a:spLocks noGrp="1"/>
+          </p:cNvSpPr>
+          <p:nvPr>
+            <p:ph type="sldNum" idx="5" sz="quarter"/>
+          </p:nvPr>
+        </p:nvSpPr>
+        <p:spPr/>
+      </p:sp>
+    </p:spTree>
+  </p:cSld>
+  <p:clrMapOvr>
+    <a:masterClrMapping/>
+  </p:clrMapOvr>
+</p:notes>
+</file>
+
+<file path=ppt/notesSlides/notesSlide2.xml><?xml version="1.0" encoding="utf-8"?>
+<p:notes xmlns:a="http://schemas.openxmlformats.org/drawingml/2006/main" xmlns:p="http://schemas.openxmlformats.org/presentationml/2006/main" xmlns:r="http://schemas.openxmlformats.org/officeDocument/2006/relationships">
+  <p:cSld>
+    <p:spTree>
+      <p:nvGrpSpPr>
+        <p:cNvPr id="1" name=""/>
+        <p:cNvGrpSpPr/>
+        <p:nvPr/>
+      </p:nvGrpSpPr>
+      <p:grpSpPr>
+        <a:xfrm>
+          <a:off x="0" y="0"/>
+          <a:ext cx="0" cy="0"/>
+          <a:chOff x="0" y="0"/>
+          <a:chExt cx="0" cy="0"/>
+        </a:xfrm>
+      </p:grpSpPr>
+      <p:sp>
+        <p:nvSpPr>
+          <p:cNvPr id="2" name="Slide Image Placeholder 1"/>
+          <p:cNvSpPr>
+            <a:spLocks noGrp="1"/>
+          </p:cNvSpPr>
+          <p:nvPr>
+            <p:ph type="sldImg" idx="2"/>
+          </p:nvPr>
+        </p:nvSpPr>
+        <p:spPr/>
+      </p:sp>
+      <p:sp>
+        <p:nvSpPr>
+          <p:cNvPr id="3" name="Notes Placeholder 2"/>
+          <p:cNvSpPr>
+            <a:spLocks noGrp="1"/>
+          </p:cNvSpPr>
+          <p:nvPr>
+            <p:ph type="body" idx="3" sz="quarter"/>
+          </p:nvPr>
+        </p:nvSpPr>
+        <p:spPr/>
+        <p:txBody>
+          <a:bodyPr/>
+          <a:lstStyle/>
+          <a:p>
+            <a:r>
+              <a:t>Il punto di partenza è la scala del problema: la moda pesa per circa il 10% delle emissioni globali di CO₂, e in Europa buttiamo 5 milioni di tonnellate di vestiti l'anno, spesso quasi nuovi — un capo fast fashion viene indossato in media solo 7 volte. Ma il problema non è solo industriale, è anche domestico: compriamo d'impulso senza sapere cosa abbiamo già, dimentichiamo capi in armadio, e buttiamo invece di riparare o donare. ClosetAI attacca proprio questi tre comportamenti.</a:t>
+            </a:r>
+          </a:p>
+        </p:txBody>
+      </p:sp>
+      <p:sp>
+        <p:nvSpPr>
+          <p:cNvPr id="4" name="Slide Number Placeholder 3"/>
+          <p:cNvSpPr>
+            <a:spLocks noGrp="1"/>
+          </p:cNvSpPr>
+          <p:nvPr>
+            <p:ph type="sldNum" idx="5" sz="quarter"/>
+          </p:nvPr>
+        </p:nvSpPr>
+        <p:spPr/>
+      </p:sp>
+    </p:spTree>
+  </p:cSld>
+  <p:clrMapOvr>
+    <a:masterClrMapping/>
+  </p:clrMapOvr>
+</p:notes>
+</file>
+
+<file path=ppt/notesSlides/notesSlide3.xml><?xml version="1.0" encoding="utf-8"?>
+<p:notes xmlns:a="http://schemas.openxmlformats.org/drawingml/2006/main" xmlns:p="http://schemas.openxmlformats.org/presentationml/2006/main" xmlns:r="http://schemas.openxmlformats.org/officeDocument/2006/relationships">
+  <p:cSld>
+    <p:spTree>
+      <p:nvGrpSpPr>
+        <p:cNvPr id="1" name=""/>
+        <p:cNvGrpSpPr/>
+        <p:nvPr/>
+      </p:nvGrpSpPr>
+      <p:grpSpPr>
+        <a:xfrm>
+          <a:off x="0" y="0"/>
+          <a:ext cx="0" cy="0"/>
+          <a:chOff x="0" y="0"/>
+          <a:chExt cx="0" cy="0"/>
+        </a:xfrm>
+      </p:grpSpPr>
+      <p:sp>
+        <p:nvSpPr>
+          <p:cNvPr id="2" name="Slide Image Placeholder 1"/>
+          <p:cNvSpPr>
+            <a:spLocks noGrp="1"/>
+          </p:cNvSpPr>
+          <p:nvPr>
+            <p:ph type="sldImg" idx="2"/>
+          </p:nvPr>
+        </p:nvSpPr>
+        <p:spPr/>
+      </p:sp>
+      <p:sp>
+        <p:nvSpPr>
+          <p:cNvPr id="3" name="Notes Placeholder 2"/>
+          <p:cNvSpPr>
+            <a:spLocks noGrp="1"/>
+          </p:cNvSpPr>
+          <p:nvPr>
+            <p:ph type="body" idx="3" sz="quarter"/>
+          </p:nvPr>
+        </p:nvSpPr>
+        <p:spPr/>
+        <p:txBody>
+          <a:bodyPr/>
+          <a:lstStyle/>
+          <a:p>
+            <a:r>
+              <a:t>Il capo che seguiamo attraversa sei momenti: lo fotografo, lo indosso, chiedo cosa mettermi, si rovina, mi chiedo se mi serve altro, e infine lo lascio andare. Questa è la mappa di tutta la presentazione. Prima di entrare nel dettaglio, fisso la legenda: useremo sempre lo stesso codice colore per capire CHE TIPO di intelligenza sta lavorando — blu per un modello pre-addestrato da altri, verde per le reti che abbiamo addestrato noi, viola per l'AI generativa che crea contenuti nuovi, giallo per la logica a regole, esplicita e trasparente. Tenetela a mente: la ritroverete a ogni tappa.</a:t>
+            </a:r>
+          </a:p>
+        </p:txBody>
+      </p:sp>
+      <p:sp>
+        <p:nvSpPr>
+          <p:cNvPr id="4" name="Slide Number Placeholder 3"/>
+          <p:cNvSpPr>
+            <a:spLocks noGrp="1"/>
+          </p:cNvSpPr>
+          <p:nvPr>
+            <p:ph type="sldNum" idx="5" sz="quarter"/>
+          </p:nvPr>
+        </p:nvSpPr>
+        <p:spPr/>
+      </p:sp>
+    </p:spTree>
+  </p:cSld>
+  <p:clrMapOvr>
+    <a:masterClrMapping/>
+  </p:clrMapOvr>
+</p:notes>
+</file>
+
+<file path=ppt/notesSlides/notesSlide4.xml><?xml version="1.0" encoding="utf-8"?>
+<p:notes xmlns:a="http://schemas.openxmlformats.org/drawingml/2006/main" xmlns:p="http://schemas.openxmlformats.org/presentationml/2006/main" xmlns:r="http://schemas.openxmlformats.org/officeDocument/2006/relationships">
+  <p:cSld>
+    <p:spTree>
+      <p:nvGrpSpPr>
+        <p:cNvPr id="1" name=""/>
+        <p:cNvGrpSpPr/>
+        <p:nvPr/>
+      </p:nvGrpSpPr>
+      <p:grpSpPr>
+        <a:xfrm>
+          <a:off x="0" y="0"/>
+          <a:ext cx="0" cy="0"/>
+          <a:chOff x="0" y="0"/>
+          <a:chExt cx="0" cy="0"/>
+        </a:xfrm>
+      </p:grpSpPr>
+      <p:sp>
+        <p:nvSpPr>
+          <p:cNvPr id="2" name="Slide Image Placeholder 1"/>
+          <p:cNvSpPr>
+            <a:spLocks noGrp="1"/>
+          </p:cNvSpPr>
+          <p:nvPr>
+            <p:ph type="sldImg" idx="2"/>
+          </p:nvPr>
+        </p:nvSpPr>
+        <p:spPr/>
+      </p:sp>
+      <p:sp>
+        <p:nvSpPr>
+          <p:cNvPr id="3" name="Notes Placeholder 2"/>
+          <p:cNvSpPr>
+            <a:spLocks noGrp="1"/>
+          </p:cNvSpPr>
+          <p:nvPr>
+            <p:ph type="body" idx="3" sz="quarter"/>
+          </p:nvPr>
+        </p:nvSpPr>
+        <p:spPr/>
+        <p:txBody>
+          <a:bodyPr/>
+          <a:lstStyle/>
+          <a:p>
+            <a:r>
+              <a:t>Prima tappa: Marco compra un capo e lo fotografa. Niente form da compilare — la foto passa a Fashion-CLIP, un modello pre-addestrato su circa 700 mila immagini di moda, che riconosce categoria e colore e produce anche un embedding visivo, un vettore che userò più avanti per la varietà degli outfit. Perché non l'abbiamo addestrato noi? Perché sarebbe irrazionale: servirebbero decine di migliaia di foto etichettate per un problema che qualcuno ha già risolto meglio di quanto potremmo fare noi con le risorse di un progetto universitario.</a:t>
+            </a:r>
+          </a:p>
+        </p:txBody>
+      </p:sp>
+      <p:sp>
+        <p:nvSpPr>
+          <p:cNvPr id="4" name="Slide Number Placeholder 3"/>
+          <p:cNvSpPr>
+            <a:spLocks noGrp="1"/>
+          </p:cNvSpPr>
+          <p:nvPr>
+            <p:ph type="sldNum" idx="5" sz="quarter"/>
+          </p:nvPr>
+        </p:nvSpPr>
+        <p:spPr/>
+      </p:sp>
+    </p:spTree>
+  </p:cSld>
+  <p:clrMapOvr>
+    <a:masterClrMapping/>
+  </p:clrMapOvr>
+</p:notes>
+</file>
+
+<file path=ppt/notesSlides/notesSlide5.xml><?xml version="1.0" encoding="utf-8"?>
+<p:notes xmlns:a="http://schemas.openxmlformats.org/drawingml/2006/main" xmlns:p="http://schemas.openxmlformats.org/presentationml/2006/main" xmlns:r="http://schemas.openxmlformats.org/officeDocument/2006/relationships">
+  <p:cSld>
+    <p:spTree>
+      <p:nvGrpSpPr>
+        <p:cNvPr id="1" name=""/>
+        <p:cNvGrpSpPr/>
+        <p:nvPr/>
+      </p:nvGrpSpPr>
+      <p:grpSpPr>
+        <a:xfrm>
+          <a:off x="0" y="0"/>
+          <a:ext cx="0" cy="0"/>
+          <a:chOff x="0" y="0"/>
+          <a:chExt cx="0" cy="0"/>
+        </a:xfrm>
+      </p:grpSpPr>
+      <p:sp>
+        <p:nvSpPr>
+          <p:cNvPr id="2" name="Slide Image Placeholder 1"/>
+          <p:cNvSpPr>
+            <a:spLocks noGrp="1"/>
+          </p:cNvSpPr>
+          <p:nvPr>
+            <p:ph type="sldImg" idx="2"/>
+          </p:nvPr>
+        </p:nvSpPr>
+        <p:spPr/>
+      </p:sp>
+      <p:sp>
+        <p:nvSpPr>
+          <p:cNvPr id="3" name="Notes Placeholder 2"/>
+          <p:cNvSpPr>
+            <a:spLocks noGrp="1"/>
+          </p:cNvSpPr>
+          <p:nvPr>
+            <p:ph type="body" idx="3" sz="quarter"/>
+          </p:nvPr>
+        </p:nvSpPr>
+        <p:spPr/>
+        <p:txBody>
+          <a:bodyPr/>
+          <a:lstStyle/>
+          <a:p>
+            <a:r>
+              <a:t>Seconda tappa: l'uso reale. Un tap su 'indossato oggi' registra l'evento, e da lì calcoliamo due metriche semplici ma potenti: il cost-per-wear, cioè prezzo diviso numero di utilizzi — quanto ti è davvero costato quel capo — e i capi 'fantasma', quelli mai indossati dopo N giorni. Qui uso deliberatamente delle regole e non una rete neurale: sono formule esatte, trasparenti, verificabili a mano. Un modello ML introdurrebbe incertezza dove non ne serve: la matematica qui è già la risposta giusta.</a:t>
+            </a:r>
+          </a:p>
+        </p:txBody>
+      </p:sp>
+      <p:sp>
+        <p:nvSpPr>
+          <p:cNvPr id="4" name="Slide Number Placeholder 3"/>
+          <p:cNvSpPr>
+            <a:spLocks noGrp="1"/>
+          </p:cNvSpPr>
+          <p:nvPr>
+            <p:ph type="sldNum" idx="5" sz="quarter"/>
+          </p:nvPr>
+        </p:nvSpPr>
+        <p:spPr/>
+      </p:sp>
+    </p:spTree>
+  </p:cSld>
+  <p:clrMapOvr>
+    <a:masterClrMapping/>
+  </p:clrMapOvr>
+</p:notes>
+</file>
+
+<file path=ppt/notesSlides/notesSlide6.xml><?xml version="1.0" encoding="utf-8"?>
+<p:notes xmlns:a="http://schemas.openxmlformats.org/drawingml/2006/main" xmlns:p="http://schemas.openxmlformats.org/presentationml/2006/main" xmlns:r="http://schemas.openxmlformats.org/officeDocument/2006/relationships">
+  <p:cSld>
+    <p:spTree>
+      <p:nvGrpSpPr>
+        <p:cNvPr id="1" name=""/>
+        <p:cNvGrpSpPr/>
+        <p:nvPr/>
+      </p:nvGrpSpPr>
+      <p:grpSpPr>
+        <a:xfrm>
+          <a:off x="0" y="0"/>
+          <a:ext cx="0" cy="0"/>
+          <a:chOff x="0" y="0"/>
+          <a:chExt cx="0" cy="0"/>
+        </a:xfrm>
+      </p:grpSpPr>
+      <p:sp>
+        <p:nvSpPr>
+          <p:cNvPr id="2" name="Slide Image Placeholder 1"/>
+          <p:cNvSpPr>
+            <a:spLocks noGrp="1"/>
+          </p:cNvSpPr>
+          <p:nvPr>
+            <p:ph type="sldImg" idx="2"/>
+          </p:nvPr>
+        </p:nvSpPr>
+        <p:spPr/>
+      </p:sp>
+      <p:sp>
+        <p:nvSpPr>
+          <p:cNvPr id="3" name="Notes Placeholder 2"/>
+          <p:cNvSpPr>
+            <a:spLocks noGrp="1"/>
+          </p:cNvSpPr>
+          <p:nvPr>
+            <p:ph type="body" idx="3" sz="quarter"/>
+          </p:nvPr>
+        </p:nvSpPr>
+        <p:spPr/>
+        <p:txBody>
+          <a:bodyPr/>
+          <a:lstStyle/>
+          <a:p>
+            <a:r>
+              <a:t>Terza tappa: 'cosa mi metto oggi?'. Il recommender combina tre ingredienti: regole di compatibilità cromatica scritte a mano — colori complementari, presenza di neutri — un filtro sul meteo del giorno via l'API Open-Meteo, e un bonus di varietà che sfrutta l'embedding di Fashion-CLIP per non riproporre sempre le stesse combinazioni. È un esempio di mix consapevole: la logica estetica resta esplicita e ispezionabile, ma appoggiata sulla percezione del modello pre-addestrato per la parte che sarebbe troppo costoso codificare a mano.</a:t>
+            </a:r>
+          </a:p>
+        </p:txBody>
+      </p:sp>
+      <p:sp>
+        <p:nvSpPr>
+          <p:cNvPr id="4" name="Slide Number Placeholder 3"/>
+          <p:cNvSpPr>
+            <a:spLocks noGrp="1"/>
+          </p:cNvSpPr>
+          <p:nvPr>
+            <p:ph type="sldNum" idx="5" sz="quarter"/>
+          </p:nvPr>
+        </p:nvSpPr>
+        <p:spPr/>
+      </p:sp>
+    </p:spTree>
+  </p:cSld>
+  <p:clrMapOvr>
+    <a:masterClrMapping/>
+  </p:clrMapOvr>
+</p:notes>
+</file>
+
+<file path=ppt/notesSlides/notesSlide7.xml><?xml version="1.0" encoding="utf-8"?>
+<p:notes xmlns:a="http://schemas.openxmlformats.org/drawingml/2006/main" xmlns:p="http://schemas.openxmlformats.org/presentationml/2006/main" xmlns:r="http://schemas.openxmlformats.org/officeDocument/2006/relationships">
+  <p:cSld>
+    <p:spTree>
+      <p:nvGrpSpPr>
+        <p:cNvPr id="1" name=""/>
+        <p:cNvGrpSpPr/>
+        <p:nvPr/>
+      </p:nvGrpSpPr>
+      <p:grpSpPr>
+        <a:xfrm>
+          <a:off x="0" y="0"/>
+          <a:ext cx="0" cy="0"/>
+          <a:chOff x="0" y="0"/>
+          <a:chExt cx="0" cy="0"/>
+        </a:xfrm>
+      </p:grpSpPr>
+      <p:sp>
+        <p:nvSpPr>
+          <p:cNvPr id="2" name="Slide Image Placeholder 1"/>
+          <p:cNvSpPr>
+            <a:spLocks noGrp="1"/>
+          </p:cNvSpPr>
+          <p:nvPr>
+            <p:ph type="sldImg" idx="2"/>
+          </p:nvPr>
+        </p:nvSpPr>
+        <p:spPr/>
+      </p:sp>
+      <p:sp>
+        <p:nvSpPr>
+          <p:cNvPr id="3" name="Notes Placeholder 2"/>
+          <p:cNvSpPr>
+            <a:spLocks noGrp="1"/>
+          </p:cNvSpPr>
+          <p:nvPr>
+            <p:ph type="body" idx="3" sz="quarter"/>
+          </p:nvPr>
+        </p:nvSpPr>
+        <p:spPr/>
+        <p:txBody>
+          <a:bodyPr/>
+          <a:lstStyle/>
+          <a:p>
+            <a:r>
+              <a:t>Quarta tappa, e la parte di cui vado più fiero dal punto di vista metodologico. Una foto entra in Fashion-CLIP, che dà l'embedding, e sopra quell'embedding abbiamo addestrato noi un piccolo MLP che predice lo stato di conservazione. Sul dataset sintetico arrivavamo al 96%, un numero bellissimo ma sospetto. Appena l'ho testato su foto reali con difetti veri, l'accuracy è crollata al 60% — un classico domain gap. Invece di nasconderlo, l'ho investigato: la confusione era quasi tutta fra due classi, 'nuovo' e 'buono', indistinguibili su foto reali. Le ho fuse in un'unica classe e l'accuracy onesta è risalita al 94%, con il danneggiato riconosciuto quasi perfettamente. Un promemoria: le vecchie feature legate al tutorial di riparazione generato via VLM sono state rimosse dal prodotto in una revisione successiva, perché aggiungevano complessità senza un beneficio proporzionato — coerenti col principio MVP first che ripeto più avanti.</a:t>
+            </a:r>
+          </a:p>
+        </p:txBody>
+      </p:sp>
+      <p:sp>
+        <p:nvSpPr>
+          <p:cNvPr id="4" name="Slide Number Placeholder 3"/>
+          <p:cNvSpPr>
+            <a:spLocks noGrp="1"/>
+          </p:cNvSpPr>
+          <p:nvPr>
+            <p:ph type="sldNum" idx="5" sz="quarter"/>
+          </p:nvPr>
+        </p:nvSpPr>
+        <p:spPr/>
+      </p:sp>
+    </p:spTree>
+  </p:cSld>
+  <p:clrMapOvr>
+    <a:masterClrMapping/>
+  </p:clrMapOvr>
+</p:notes>
+</file>
+
+<file path=ppt/notesSlides/notesSlide8.xml><?xml version="1.0" encoding="utf-8"?>
+<p:notes xmlns:a="http://schemas.openxmlformats.org/drawingml/2006/main" xmlns:p="http://schemas.openxmlformats.org/presentationml/2006/main" xmlns:r="http://schemas.openxmlformats.org/officeDocument/2006/relationships">
+  <p:cSld>
+    <p:spTree>
+      <p:nvGrpSpPr>
+        <p:cNvPr id="1" name=""/>
+        <p:cNvGrpSpPr/>
+        <p:nvPr/>
+      </p:nvGrpSpPr>
+      <p:grpSpPr>
+        <a:xfrm>
+          <a:off x="0" y="0"/>
+          <a:ext cx="0" cy="0"/>
+          <a:chOff x="0" y="0"/>
+          <a:chExt cx="0" cy="0"/>
+        </a:xfrm>
+      </p:grpSpPr>
+      <p:sp>
+        <p:nvSpPr>
+          <p:cNvPr id="2" name="Slide Image Placeholder 1"/>
+          <p:cNvSpPr>
+            <a:spLocks noGrp="1"/>
+          </p:cNvSpPr>
+          <p:nvPr>
+            <p:ph type="sldImg" idx="2"/>
+          </p:nvPr>
+        </p:nvSpPr>
+        <p:spPr/>
+      </p:sp>
+      <p:sp>
+        <p:nvSpPr>
+          <p:cNvPr id="3" name="Notes Placeholder 2"/>
+          <p:cNvSpPr>
+            <a:spLocks noGrp="1"/>
+          </p:cNvSpPr>
+          <p:nvPr>
+            <p:ph type="body" idx="3" sz="quarter"/>
+          </p:nvPr>
+        </p:nvSpPr>
+        <p:spPr/>
+        <p:txBody>
+          <a:bodyPr/>
+          <a:lstStyle/>
+          <a:p>
+            <a:r>
+              <a:t>Quinta tappa: prima di comprare, conviene guardare l'armadio nel suo insieme. Qui cambia livello: non guardiamo più una foto ma i dati aggregati che Fashion-CLIP ha già prodotto capo per capo — quanti per categoria, quali colori, quanto vengono usati. Una seconda rete che abbiamo addestrato noi, multi-label, impara a riconoscere i vuoti funzionali: manca una giacca, ci sono troppe t-shirt. È addestrata su un dataset sintetico con etichette da regole esperte più rumore, così la rete impara le soglie invece di copiarle: un limite dichiarato, che miglioreremmo con feedback reale degli utenti.</a:t>
+            </a:r>
+          </a:p>
+        </p:txBody>
+      </p:sp>
+      <p:sp>
+        <p:nvSpPr>
+          <p:cNvPr id="4" name="Slide Number Placeholder 3"/>
+          <p:cNvSpPr>
+            <a:spLocks noGrp="1"/>
+          </p:cNvSpPr>
+          <p:nvPr>
+            <p:ph type="sldNum" idx="5" sz="quarter"/>
+          </p:nvPr>
+        </p:nvSpPr>
+        <p:spPr/>
+      </p:sp>
+    </p:spTree>
+  </p:cSld>
+  <p:clrMapOvr>
+    <a:masterClrMapping/>
+  </p:clrMapOvr>
+</p:notes>
+</file>
+
+<file path=ppt/notesSlides/notesSlide9.xml><?xml version="1.0" encoding="utf-8"?>
+<p:notes xmlns:a="http://schemas.openxmlformats.org/drawingml/2006/main" xmlns:p="http://schemas.openxmlformats.org/presentationml/2006/main" xmlns:r="http://schemas.openxmlformats.org/officeDocument/2006/relationships">
+  <p:cSld>
+    <p:spTree>
+      <p:nvGrpSpPr>
+        <p:cNvPr id="1" name=""/>
+        <p:cNvGrpSpPr/>
+        <p:nvPr/>
+      </p:nvGrpSpPr>
+      <p:grpSpPr>
+        <a:xfrm>
+          <a:off x="0" y="0"/>
+          <a:ext cx="0" cy="0"/>
+          <a:chOff x="0" y="0"/>
+          <a:chExt cx="0" cy="0"/>
+        </a:xfrm>
+      </p:grpSpPr>
+      <p:sp>
+        <p:nvSpPr>
+          <p:cNvPr id="2" name="Slide Image Placeholder 1"/>
+          <p:cNvSpPr>
+            <a:spLocks noGrp="1"/>
+          </p:cNvSpPr>
+          <p:nvPr>
+            <p:ph type="sldImg" idx="2"/>
+          </p:nvPr>
+        </p:nvSpPr>
+        <p:spPr/>
+      </p:sp>
+      <p:sp>
+        <p:nvSpPr>
+          <p:cNvPr id="3" name="Notes Placeholder 2"/>
+          <p:cNvSpPr>
+            <a:spLocks noGrp="1"/>
+          </p:cNvSpPr>
+          <p:nvPr>
+            <p:ph type="body" idx="3" sz="quarter"/>
+          </p:nvPr>
+        </p:nvSpPr>
+        <p:spPr/>
+        <p:txBody>
+          <a:bodyPr/>
+          <a:lstStyle/>
+          <a:p>
+            <a:r>
+              <a:t>Sesta e ultima tappa del ciclo di vita: il capo non serve più a Marco. In base allo stato diagnosticato alla tappa 4, l'app suggerisce l'azione più coerente con la gerarchia dell'economia circolare — riparare prima di riciclare, rivendere o donare prima di buttare — e stima i kg di CO₂ evitati con una tabella per categoria di capo, presa da fonti LCA autorevoli come la Ellen MacArthur Foundation. Anche qui niente rete neurale: la relazione materiale-impatto è già nota, e una rete darebbe solo falsa precisione dove serve invece un numero trasparente e citabile.</a:t>
+            </a:r>
+          </a:p>
+        </p:txBody>
+      </p:sp>
+      <p:sp>
+        <p:nvSpPr>
+          <p:cNvPr id="4" name="Slide Number Placeholder 3"/>
+          <p:cNvSpPr>
+            <a:spLocks noGrp="1"/>
+          </p:cNvSpPr>
+          <p:nvPr>
+            <p:ph type="sldNum" idx="5" sz="quarter"/>
+          </p:nvPr>
+        </p:nvSpPr>
+        <p:spPr/>
+      </p:sp>
+    </p:spTree>
+  </p:cSld>
+  <p:clrMapOvr>
+    <a:masterClrMapping/>
+  </p:clrMapOvr>
+</p:notes>
 </file>
 
 <file path=ppt/slideLayouts/slideLayout1.xml><?xml version="1.0" encoding="utf-8"?>
@@ -4223,7 +5623,7 @@
                 </a:solidFill>
                 <a:latin typeface="Calibri"/>
               </a:rPr>
-              <a:t>Rete stato + tutorial</a:t>
+              <a:t>Rete stato del capo</a:t>
             </a:r>
           </a:p>
           <a:p>
@@ -4239,7 +5639,7 @@
                 </a:solidFill>
                 <a:latin typeface="Calibri"/>
               </a:rPr>
-              <a:t>🟩 nostra + 🟪 generativa</a:t>
+              <a:t>🟩 nostra</a:t>
             </a:r>
           </a:p>
           <a:p>
@@ -4255,7 +5655,7 @@
                 </a:solidFill>
                 <a:latin typeface="Calibri"/>
               </a:rPr>
-              <a:t>→ stato + tutorial di recupero</a:t>
+              <a:t>→ buono / usurato / danneggiato</a:t>
             </a:r>
           </a:p>
         </p:txBody>
@@ -5467,7 +6867,7 @@
                 </a:solidFill>
                 <a:latin typeface="Calibri"/>
               </a:rPr>
-              <a:t>LLM · VLM · diffusion</a:t>
+              <a:t>LLM · diffusion</a:t>
             </a:r>
           </a:p>
           <a:p>
@@ -5484,8 +6884,8 @@
                 <a:latin typeface="Calibri"/>
               </a:rPr>
               <a:t>Quando serve creare contenuto nuovo e
-personalizzato: tutorial di riparazione,
-descrizioni, prova virtuale del capo.</a:t>
+personalizzato: descrizioni narrative,
+coach di sostenibilità, prova virtuale.</a:t>
             </a:r>
           </a:p>
         </p:txBody>
@@ -8846,7 +10246,7 @@
                 <a:latin typeface="Calibri"/>
               </a:rPr>
               <a:t>Produce contenuti nuovi (testi, immagini).
-Es. tutorial, descrizioni, try-on.</a:t>
+Es. descrizioni, coach, try-on virtuale.</a:t>
             </a:r>
           </a:p>
         </p:txBody>
@@ -10829,7 +12229,7 @@
                 </a:solidFill>
                 <a:latin typeface="Calibri"/>
               </a:rPr>
-              <a:t>L'app capisce lo stato e spiega come salvarlo.</a:t>
+              <a:t>L'app riconosce lo stato dalla foto.</a:t>
             </a:r>
           </a:p>
         </p:txBody>
@@ -10864,7 +12264,7 @@
                 </a:solidFill>
                 <a:latin typeface="Calibri"/>
               </a:rPr>
-              <a:t>Qui lavorano insieme una rete nostra e l'AI generativa.</a:t>
+              <a:t>La nostra prima rete neurale, e la sua validazione onesta.</a:t>
             </a:r>
           </a:p>
         </p:txBody>
@@ -11017,7 +12417,7 @@
                 </a:solidFill>
                 <a:latin typeface="Calibri"/>
               </a:rPr>
-              <a:t>L'app gli dice se è usurato o</a:t>
+              <a:t>L'app gli dice se è in buono stato,</a:t>
             </a:r>
           </a:p>
           <a:p>
@@ -11033,7 +12433,7 @@
                 </a:solidFill>
                 <a:latin typeface="Calibri"/>
               </a:rPr>
-              <a:t>danneggiato, e gli propone un</a:t>
+              <a:t>usurato o danneggiato — e da lì</a:t>
             </a:r>
           </a:p>
           <a:p>
@@ -11049,7 +12449,7 @@
                 </a:solidFill>
                 <a:latin typeface="Calibri"/>
               </a:rPr>
-              <a:t>tutorial di riparazione scritto su</a:t>
+              <a:t>parte il suggerimento dell'azione</a:t>
             </a:r>
           </a:p>
           <a:p>
@@ -11065,23 +12465,7 @@
                 </a:solidFill>
                 <a:latin typeface="Calibri"/>
               </a:rPr>
-              <a:t>misura per quel capo — invece di</a:t>
-            </a:r>
-          </a:p>
-          <a:p>
-            <a:pPr algn="l">
-              <a:spcAft>
-                <a:spcPts val="400"/>
-              </a:spcAft>
-            </a:pPr>
-            <a:r>
-              <a:rPr sz="1300" b="0" i="0">
-                <a:solidFill>
-                  <a:srgbClr val="6B7182"/>
-                </a:solidFill>
-                <a:latin typeface="Calibri"/>
-              </a:rPr>
-              <a:t>buttarlo.</a:t>
+              <a:t>circolare migliore (tappa 6).</a:t>
             </a:r>
           </a:p>
         </p:txBody>
@@ -11185,13 +12569,61 @@
               </a:spcAft>
             </a:pPr>
             <a:r>
+              <a:rPr sz="400" b="0" i="0">
+                <a:solidFill>
+                  <a:srgbClr val="1A1D27"/>
+                </a:solidFill>
+                <a:latin typeface="Calibri"/>
+              </a:rPr>
+              <a:t/>
+            </a:r>
+          </a:p>
+          <a:p>
+            <a:pPr algn="l">
+              <a:spcAft>
+                <a:spcPts val="600"/>
+              </a:spcAft>
+            </a:pPr>
+            <a:r>
+              <a:rPr sz="1500" b="1" i="0">
+                <a:solidFill>
+                  <a:srgbClr val="1A1D27"/>
+                </a:solidFill>
+                <a:latin typeface="Calibri"/>
+              </a:rPr>
+              <a:t>Rete dello STATO (addestrata da noi)</a:t>
+            </a:r>
+          </a:p>
+          <a:p>
+            <a:pPr algn="l">
+              <a:spcAft>
+                <a:spcPts val="800"/>
+              </a:spcAft>
+            </a:pPr>
+            <a:r>
+              <a:rPr sz="1200" b="0" i="0">
+                <a:solidFill>
+                  <a:srgbClr val="6B7182"/>
+                </a:solidFill>
+                <a:latin typeface="Calibri"/>
+              </a:rPr>
+              <a:t>Fashion-CLIP (frozen) → MLP 512→256→128→3</a:t>
+            </a:r>
+          </a:p>
+          <a:p>
+            <a:pPr algn="l">
+              <a:spcAft>
+                <a:spcPts val="200"/>
+              </a:spcAft>
+            </a:pPr>
+            <a:r>
               <a:rPr sz="1200" b="1" i="0">
                 <a:solidFill>
-                  <a:srgbClr val="7A4FC4"/>
-                </a:solidFill>
-                <a:latin typeface="Calibri"/>
-              </a:rPr>
-              <a:t>🟪 AI GENERATIVA</a:t>
+                  <a:srgbClr val="2F8F6E"/>
+                </a:solidFill>
+                <a:latin typeface="Calibri"/>
+              </a:rPr>
+              <a:t>Validazione onesta:</a:t>
             </a:r>
           </a:p>
           <a:p>
@@ -11201,29 +12633,29 @@
               </a:spcAft>
             </a:pPr>
             <a:r>
-              <a:rPr sz="400" b="0" i="0">
-                <a:solidFill>
-                  <a:srgbClr val="1A1D27"/>
-                </a:solidFill>
-                <a:latin typeface="Calibri"/>
-              </a:rPr>
-              <a:t/>
-            </a:r>
-          </a:p>
-          <a:p>
-            <a:pPr algn="l">
-              <a:spcAft>
-                <a:spcPts val="600"/>
-              </a:spcAft>
-            </a:pPr>
-            <a:r>
-              <a:rPr sz="1500" b="1" i="0">
-                <a:solidFill>
-                  <a:srgbClr val="1A1D27"/>
-                </a:solidFill>
-                <a:latin typeface="Calibri"/>
-              </a:rPr>
-              <a:t>Due AI in sequenza</a:t>
+              <a:rPr sz="1100" b="0" i="0">
+                <a:solidFill>
+                  <a:srgbClr val="6B7182"/>
+                </a:solidFill>
+                <a:latin typeface="Calibri"/>
+              </a:rPr>
+              <a:t>dati sintetici → 96% (sovrastima) · su foto reali</a:t>
+            </a:r>
+          </a:p>
+          <a:p>
+            <a:pPr algn="l">
+              <a:spcAft>
+                <a:spcPts val="400"/>
+              </a:spcAft>
+            </a:pPr>
+            <a:r>
+              <a:rPr sz="1100" b="0" i="0">
+                <a:solidFill>
+                  <a:srgbClr val="6B7182"/>
+                </a:solidFill>
+                <a:latin typeface="Calibri"/>
+              </a:rPr>
+              <a:t>con difetti veri (dataset COCO) crolla al 60%.</a:t>
             </a:r>
           </a:p>
           <a:p>
@@ -11233,13 +12665,13 @@
               </a:spcAft>
             </a:pPr>
             <a:r>
-              <a:rPr sz="1200" b="1" i="0">
-                <a:solidFill>
-                  <a:srgbClr val="2F8F6E"/>
-                </a:solidFill>
-                <a:latin typeface="Calibri"/>
-              </a:rPr>
-              <a:t>🟩 Rete dello STATO (addestrata da noi)</a:t>
+              <a:rPr sz="1100" b="0" i="0">
+                <a:solidFill>
+                  <a:srgbClr val="6B7182"/>
+                </a:solidFill>
+                <a:latin typeface="Calibri"/>
+              </a:rPr>
+              <a:t>Causa: confine artificiale fra due classi troppo</a:t>
             </a:r>
           </a:p>
           <a:p>
@@ -11255,87 +12687,23 @@
                 </a:solidFill>
                 <a:latin typeface="Calibri"/>
               </a:rPr>
-              <a:t>dalla foto → nuovo / usurato / danneggiato.</a:t>
-            </a:r>
-          </a:p>
-          <a:p>
-            <a:pPr algn="l">
-              <a:spcAft>
-                <a:spcPts val="200"/>
-              </a:spcAft>
-            </a:pPr>
-            <a:r>
-              <a:rPr sz="1200" b="1" i="0">
-                <a:solidFill>
-                  <a:srgbClr val="7A4FC4"/>
-                </a:solidFill>
-                <a:latin typeface="Calibri"/>
-              </a:rPr>
-              <a:t>🟪 Tutorial GENERATIVO</a:t>
-            </a:r>
-          </a:p>
-          <a:p>
-            <a:pPr algn="l">
-              <a:spcAft>
-                <a:spcPts val="200"/>
-              </a:spcAft>
-            </a:pPr>
-            <a:r>
-              <a:rPr sz="1100" b="0" i="0">
+              <a:t>simili. Fuse in 3 classi oneste → 94% reale.</a:t>
+            </a:r>
+          </a:p>
+          <a:p>
+            <a:pPr algn="l">
+              <a:spcAft>
+                <a:spcPts val="400"/>
+              </a:spcAft>
+            </a:pPr>
+            <a:r>
+              <a:rPr sz="1100" b="0" i="1">
                 <a:solidFill>
                   <a:srgbClr val="6B7182"/>
                 </a:solidFill>
                 <a:latin typeface="Calibri"/>
               </a:rPr>
-              <a:t>un LLM/VLM scrive le istruzioni di riparazione</a:t>
-            </a:r>
-          </a:p>
-          <a:p>
-            <a:pPr algn="l">
-              <a:spcAft>
-                <a:spcPts val="800"/>
-              </a:spcAft>
-            </a:pPr>
-            <a:r>
-              <a:rPr sz="1100" b="0" i="0">
-                <a:solidFill>
-                  <a:srgbClr val="6B7182"/>
-                </a:solidFill>
-                <a:latin typeface="Calibri"/>
-              </a:rPr>
-              <a:t>personalizzate sul capo (colore, punto del danno).</a:t>
-            </a:r>
-          </a:p>
-          <a:p>
-            <a:pPr algn="l">
-              <a:spcAft>
-                <a:spcPts val="200"/>
-              </a:spcAft>
-            </a:pPr>
-            <a:r>
-              <a:rPr sz="1100" b="0" i="1">
-                <a:solidFill>
-                  <a:srgbClr val="6B7182"/>
-                </a:solidFill>
-                <a:latin typeface="Calibri"/>
-              </a:rPr>
-              <a:t>Riconoscere lo stato = classificare (rete nostra).</a:t>
-            </a:r>
-          </a:p>
-          <a:p>
-            <a:pPr algn="l">
-              <a:spcAft>
-                <a:spcPts val="400"/>
-              </a:spcAft>
-            </a:pPr>
-            <a:r>
-              <a:rPr sz="1100" b="0" i="1">
-                <a:solidFill>
-                  <a:srgbClr val="6B7182"/>
-                </a:solidFill>
-                <a:latin typeface="Calibri"/>
-              </a:rPr>
-              <a:t>Scrivere il tutorial = creare testo (generativa).</a:t>
+              <a:t>Un errore trovato e corretto, non nascosto.</a:t>
             </a:r>
           </a:p>
         </p:txBody>
@@ -13032,4 +14400,324 @@
   </a:objectDefaults>
   <a:extraClrSchemeLst/>
 </a:theme>
+</file>
+
+<file path=ppt/theme/theme2.xml><?xml version="1.0" encoding="utf-8"?>
+<a:theme xmlns:a="http://schemas.openxmlformats.org/drawingml/2006/main" name="Office Theme">
+  <a:themeElements>
+    <a:clrScheme name="Office">
+      <a:dk1>
+        <a:sysClr val="windowText" lastClr="000000"/>
+      </a:dk1>
+      <a:lt1>
+        <a:sysClr val="window" lastClr="FFFFFF"/>
+      </a:lt1>
+      <a:dk2>
+        <a:srgbClr val="1F497D"/>
+      </a:dk2>
+      <a:lt2>
+        <a:srgbClr val="EEECE1"/>
+      </a:lt2>
+      <a:accent1>
+        <a:srgbClr val="4F81BD"/>
+      </a:accent1>
+      <a:accent2>
+        <a:srgbClr val="C0504D"/>
+      </a:accent2>
+      <a:accent3>
+        <a:srgbClr val="9BBB59"/>
+      </a:accent3>
+      <a:accent4>
+        <a:srgbClr val="8064A2"/>
+      </a:accent4>
+      <a:accent5>
+        <a:srgbClr val="4BACC6"/>
+      </a:accent5>
+      <a:accent6>
+        <a:srgbClr val="F79646"/>
+      </a:accent6>
+      <a:hlink>
+        <a:srgbClr val="0000FF"/>
+      </a:hlink>
+      <a:folHlink>
+        <a:srgbClr val="800080"/>
+      </a:folHlink>
+    </a:clrScheme>
+    <a:fontScheme name="Office">
+      <a:majorFont>
+        <a:latin typeface="Calibri"/>
+        <a:ea typeface=""/>
+        <a:cs typeface=""/>
+        <a:font script="Jpan" typeface="ＭＳ Ｐゴシック"/>
+        <a:font script="Hang" typeface="맑은 고딕"/>
+        <a:font script="Hans" typeface="宋体"/>
+        <a:font script="Hant" typeface="新細明體"/>
+        <a:font script="Arab" typeface="Times New Roman"/>
+        <a:font script="Hebr" typeface="Times New Roman"/>
+        <a:font script="Thai" typeface="Angsana New"/>
+        <a:font script="Ethi" typeface="Nyala"/>
+        <a:font script="Beng" typeface="Vrinda"/>
+        <a:font script="Gujr" typeface="Shruti"/>
+        <a:font script="Khmr" typeface="MoolBoran"/>
+        <a:font script="Knda" typeface="Tunga"/>
+        <a:font script="Guru" typeface="Raavi"/>
+        <a:font script="Cans" typeface="Euphemia"/>
+        <a:font script="Cher" typeface="Plantagenet Cherokee"/>
+        <a:font script="Yiii" typeface="Microsoft Yi Baiti"/>
+        <a:font script="Tibt" typeface="Microsoft Himalaya"/>
+        <a:font script="Thaa" typeface="MV Boli"/>
+        <a:font script="Deva" typeface="Mangal"/>
+        <a:font script="Telu" typeface="Gautami"/>
+        <a:font script="Taml" typeface="Latha"/>
+        <a:font script="Syrc" typeface="Estrangelo Edessa"/>
+        <a:font script="Orya" typeface="Kalinga"/>
+        <a:font script="Mlym" typeface="Kartika"/>
+        <a:font script="Laoo" typeface="DokChampa"/>
+        <a:font script="Sinh" typeface="Iskoola Pota"/>
+        <a:font script="Mong" typeface="Mongolian Baiti"/>
+        <a:font script="Viet" typeface="Times New Roman"/>
+        <a:font script="Uigh" typeface="Microsoft Uighur"/>
+        <a:font script="Geor" typeface="Sylfaen"/>
+      </a:majorFont>
+      <a:minorFont>
+        <a:latin typeface="Calibri"/>
+        <a:ea typeface=""/>
+        <a:cs typeface=""/>
+        <a:font script="Jpan" typeface="ＭＳ Ｐゴシック"/>
+        <a:font script="Hang" typeface="맑은 고딕"/>
+        <a:font script="Hans" typeface="宋体"/>
+        <a:font script="Hant" typeface="新細明體"/>
+        <a:font script="Arab" typeface="Arial"/>
+        <a:font script="Hebr" typeface="Arial"/>
+        <a:font script="Thai" typeface="Cordia New"/>
+        <a:font script="Ethi" typeface="Nyala"/>
+        <a:font script="Beng" typeface="Vrinda"/>
+        <a:font script="Gujr" typeface="Shruti"/>
+        <a:font script="Khmr" typeface="DaunPenh"/>
+        <a:font script="Knda" typeface="Tunga"/>
+        <a:font script="Guru" typeface="Raavi"/>
+        <a:font script="Cans" typeface="Euphemia"/>
+        <a:font script="Cher" typeface="Plantagenet Cherokee"/>
+        <a:font script="Yiii" typeface="Microsoft Yi Baiti"/>
+        <a:font script="Tibt" typeface="Microsoft Himalaya"/>
+        <a:font script="Thaa" typeface="MV Boli"/>
+        <a:font script="Deva" typeface="Mangal"/>
+        <a:font script="Telu" typeface="Gautami"/>
+        <a:font script="Taml" typeface="Latha"/>
+        <a:font script="Syrc" typeface="Estrangelo Edessa"/>
+        <a:font script="Orya" typeface="Kalinga"/>
+        <a:font script="Mlym" typeface="Kartika"/>
+        <a:font script="Laoo" typeface="DokChampa"/>
+        <a:font script="Sinh" typeface="Iskoola Pota"/>
+        <a:font script="Mong" typeface="Mongolian Baiti"/>
+        <a:font script="Viet" typeface="Arial"/>
+        <a:font script="Uigh" typeface="Microsoft Uighur"/>
+        <a:font script="Geor" typeface="Sylfaen"/>
+      </a:minorFont>
+    </a:fontScheme>
+    <a:fmtScheme name="Office">
+      <a:fillStyleLst>
+        <a:solidFill>
+          <a:schemeClr val="phClr"/>
+        </a:solidFill>
+        <a:gradFill rotWithShape="1">
+          <a:gsLst>
+            <a:gs pos="0">
+              <a:schemeClr val="phClr">
+                <a:tint val="50000"/>
+                <a:satMod val="300000"/>
+              </a:schemeClr>
+            </a:gs>
+            <a:gs pos="35000">
+              <a:schemeClr val="phClr">
+                <a:tint val="37000"/>
+                <a:satMod val="300000"/>
+              </a:schemeClr>
+            </a:gs>
+            <a:gs pos="100000">
+              <a:schemeClr val="phClr">
+                <a:tint val="15000"/>
+                <a:satMod val="350000"/>
+              </a:schemeClr>
+            </a:gs>
+          </a:gsLst>
+          <a:lin ang="16200000" scaled="1"/>
+        </a:gradFill>
+        <a:gradFill rotWithShape="1">
+          <a:gsLst>
+            <a:gs pos="0">
+              <a:schemeClr val="phClr">
+                <a:tint val="100000"/>
+                <a:shade val="100000"/>
+                <a:satMod val="130000"/>
+              </a:schemeClr>
+            </a:gs>
+            <a:gs pos="100000">
+              <a:schemeClr val="phClr">
+                <a:tint val="50000"/>
+                <a:shade val="100000"/>
+                <a:satMod val="350000"/>
+              </a:schemeClr>
+            </a:gs>
+          </a:gsLst>
+          <a:lin ang="16200000" scaled="0"/>
+        </a:gradFill>
+      </a:fillStyleLst>
+      <a:lnStyleLst>
+        <a:ln w="9525" cap="flat" cmpd="sng" algn="ctr">
+          <a:solidFill>
+            <a:schemeClr val="phClr">
+              <a:shade val="95000"/>
+              <a:satMod val="105000"/>
+            </a:schemeClr>
+          </a:solidFill>
+          <a:prstDash val="solid"/>
+        </a:ln>
+        <a:ln w="25400" cap="flat" cmpd="sng" algn="ctr">
+          <a:solidFill>
+            <a:schemeClr val="phClr"/>
+          </a:solidFill>
+          <a:prstDash val="solid"/>
+        </a:ln>
+        <a:ln w="38100" cap="flat" cmpd="sng" algn="ctr">
+          <a:solidFill>
+            <a:schemeClr val="phClr"/>
+          </a:solidFill>
+          <a:prstDash val="solid"/>
+        </a:ln>
+      </a:lnStyleLst>
+      <a:effectStyleLst>
+        <a:effectStyle>
+          <a:effectLst>
+            <a:outerShdw blurRad="40000" dist="20000" dir="5400000" rotWithShape="0">
+              <a:srgbClr val="000000">
+                <a:alpha val="38000"/>
+              </a:srgbClr>
+            </a:outerShdw>
+          </a:effectLst>
+        </a:effectStyle>
+        <a:effectStyle>
+          <a:effectLst>
+            <a:outerShdw blurRad="40000" dist="23000" dir="5400000" rotWithShape="0">
+              <a:srgbClr val="000000">
+                <a:alpha val="35000"/>
+              </a:srgbClr>
+            </a:outerShdw>
+          </a:effectLst>
+        </a:effectStyle>
+        <a:effectStyle>
+          <a:effectLst>
+            <a:outerShdw blurRad="40000" dist="23000" dir="5400000" rotWithShape="0">
+              <a:srgbClr val="000000">
+                <a:alpha val="35000"/>
+              </a:srgbClr>
+            </a:outerShdw>
+          </a:effectLst>
+          <a:scene3d>
+            <a:camera prst="orthographicFront">
+              <a:rot lat="0" lon="0" rev="0"/>
+            </a:camera>
+            <a:lightRig rig="threePt" dir="t">
+              <a:rot lat="0" lon="0" rev="1200000"/>
+            </a:lightRig>
+          </a:scene3d>
+          <a:sp3d>
+            <a:bevelT w="63500" h="25400"/>
+          </a:sp3d>
+        </a:effectStyle>
+      </a:effectStyleLst>
+      <a:bgFillStyleLst>
+        <a:solidFill>
+          <a:schemeClr val="phClr"/>
+        </a:solidFill>
+        <a:gradFill rotWithShape="1">
+          <a:gsLst>
+            <a:gs pos="0">
+              <a:schemeClr val="phClr">
+                <a:tint val="40000"/>
+                <a:satMod val="350000"/>
+              </a:schemeClr>
+            </a:gs>
+            <a:gs pos="40000">
+              <a:schemeClr val="phClr">
+                <a:tint val="45000"/>
+                <a:shade val="99000"/>
+                <a:satMod val="350000"/>
+              </a:schemeClr>
+            </a:gs>
+            <a:gs pos="100000">
+              <a:schemeClr val="phClr">
+                <a:shade val="20000"/>
+                <a:satMod val="255000"/>
+              </a:schemeClr>
+            </a:gs>
+          </a:gsLst>
+          <a:path path="circle">
+            <a:fillToRect l="50000" t="-80000" r="50000" b="180000"/>
+          </a:path>
+        </a:gradFill>
+        <a:gradFill rotWithShape="1">
+          <a:gsLst>
+            <a:gs pos="0">
+              <a:schemeClr val="phClr">
+                <a:tint val="80000"/>
+                <a:satMod val="300000"/>
+              </a:schemeClr>
+            </a:gs>
+            <a:gs pos="100000">
+              <a:schemeClr val="phClr">
+                <a:shade val="30000"/>
+                <a:satMod val="200000"/>
+              </a:schemeClr>
+            </a:gs>
+          </a:gsLst>
+          <a:path path="circle">
+            <a:fillToRect l="50000" t="50000" r="50000" b="50000"/>
+          </a:path>
+        </a:gradFill>
+      </a:bgFillStyleLst>
+    </a:fmtScheme>
+  </a:themeElements>
+  <a:objectDefaults>
+    <a:spDef>
+      <a:spPr/>
+      <a:bodyPr/>
+      <a:lstStyle/>
+      <a:style>
+        <a:lnRef idx="1">
+          <a:schemeClr val="accent1"/>
+        </a:lnRef>
+        <a:fillRef idx="3">
+          <a:schemeClr val="accent1"/>
+        </a:fillRef>
+        <a:effectRef idx="2">
+          <a:schemeClr val="accent1"/>
+        </a:effectRef>
+        <a:fontRef idx="minor">
+          <a:schemeClr val="lt1"/>
+        </a:fontRef>
+      </a:style>
+    </a:spDef>
+    <a:lnDef>
+      <a:spPr/>
+      <a:bodyPr/>
+      <a:lstStyle/>
+      <a:style>
+        <a:lnRef idx="2">
+          <a:schemeClr val="accent1"/>
+        </a:lnRef>
+        <a:fillRef idx="0">
+          <a:schemeClr val="accent1"/>
+        </a:fillRef>
+        <a:effectRef idx="1">
+          <a:schemeClr val="accent1"/>
+        </a:effectRef>
+        <a:fontRef idx="minor">
+          <a:schemeClr val="tx1"/>
+        </a:fontRef>
+      </a:style>
+    </a:lnDef>
+  </a:objectDefaults>
+  <a:extraClrSchemeLst/>
+</a:theme>
 </file>